--- a/docs/deck/ai_to_lab_orchestrator.pptx
+++ b/docs/deck/ai_to_lab_orchestrator.pptx
@@ -20,9 +20,10 @@
     <p:sldId id="268" r:id="rId14"/>
     <p:sldId id="269" r:id="rId15"/>
     <p:sldId id="270" r:id="rId16"/>
+    <p:sldId id="271" r:id="rId17"/>
   </p:sldIdLst>
   <p:notesMasterIdLst>
-    <p:notesMasterId r:id="rId17"/>
+    <p:notesMasterId r:id="rId18"/>
   </p:notesMasterIdLst>
   <p:sldSz cx="12192000" cy="6858000"/>
   <p:notesSz cx="6858000" cy="12192000"/>
@@ -1822,7 +1823,7 @@
           <a:p>
             <a:r>
               <a:rPr lang="en-US" dirty="0"/>
-              <a:t>Prompted by watching how an automated-lab company actually runs their floor: an operator with gloves on, working from a tablet at the bench. That fixed the form factor.</a:t>
+              <a:t>Worth dwelling on in conversation: I did not design the second-order effect, I saw it by running the loop. It is the clearest evidence that this is a system with behaviour rather than a set of scripts.</a:t>
             </a:r>
             <a:endParaRPr lang="en-US" dirty="0"/>
           </a:p>
@@ -1910,7 +1911,7 @@
           <a:p>
             <a:r>
               <a:rPr lang="en-US" dirty="0"/>
-              <a:t>This is the slide that separates me from a candidate who only shows what worked. The pattern across all five is the same: the failure mode that matters is the silent one, where the system looks right and is not.</a:t>
+              <a:t>Prompted by watching how an automated-lab company actually runs their floor: an operator with gloves on, working from a tablet at the bench. That fixed the form factor.</a:t>
             </a:r>
             <a:endParaRPr lang="en-US" dirty="0"/>
           </a:p>
@@ -1998,7 +1999,7 @@
           <a:p>
             <a:r>
               <a:rPr lang="en-US" dirty="0"/>
-              <a:t>Every row is a judgment call I would defend. In a real programme, deciding what not to build is most of the job.</a:t>
+              <a:t>This is the slide that separates me from a candidate who only shows what worked. The pattern across all five is the same: the failure mode that matters is the silent one, where the system looks right and is not.</a:t>
             </a:r>
             <a:endParaRPr lang="en-US" dirty="0"/>
           </a:p>
@@ -2086,7 +2087,7 @@
           <a:p>
             <a:r>
               <a:rPr lang="en-US" dirty="0"/>
-              <a:t>Close on intent, not on modesty. The seniority question is answered by saying plainly that I am optimizing for direction and team, not title.</a:t>
+              <a:t>Every row is a judgment call I would defend. In a real programme, deciding what not to build is most of the job.</a:t>
             </a:r>
             <a:endParaRPr lang="en-US" dirty="0"/>
           </a:p>
@@ -2110,6 +2111,94 @@
             <a:fld id="{F7021451-1387-4CA6-816F-3879F97B5CBC}" type="slidenum">
               <a:rPr lang="en-US"/>
               <a:t>15</a:t>
+            </a:fld>
+            <a:endParaRPr lang="en-US"/>
+          </a:p>
+        </p:txBody>
+      </p:sp>
+    </p:spTree>
+    <p:extLst>
+      <p:ext uri="{BB962C8B-B14F-4D97-AF65-F5344CB8AC3E}">
+        <p14:creationId xmlns:p14="http://schemas.microsoft.com/office/powerpoint/2010/main" val="1024086991"/>
+      </p:ext>
+    </p:extLst>
+  </p:cSld>
+  <p:clrMapOvr>
+    <a:masterClrMapping/>
+  </p:clrMapOvr>
+</p:notes>
+</file>
+
+<file path=ppt/notesSlides/notesSlide16.xml><?xml version="1.0" encoding="utf-8"?>
+<p:notes xmlns:a="http://schemas.openxmlformats.org/drawingml/2006/main" xmlns:r="http://schemas.openxmlformats.org/officeDocument/2006/relationships" xmlns:p="http://schemas.openxmlformats.org/presentationml/2006/main">
+  <p:cSld>
+    <p:spTree>
+      <p:nvGrpSpPr>
+        <p:cNvPr id="1" name=""/>
+        <p:cNvGrpSpPr/>
+        <p:nvPr/>
+      </p:nvGrpSpPr>
+      <p:grpSpPr>
+        <a:xfrm>
+          <a:off x="0" y="0"/>
+          <a:ext cx="0" cy="0"/>
+          <a:chOff x="0" y="0"/>
+          <a:chExt cx="0" cy="0"/>
+        </a:xfrm>
+      </p:grpSpPr>
+      <p:sp>
+        <p:nvSpPr>
+          <p:cNvPr id="2" name="Slide Image Placeholder 1"/>
+          <p:cNvSpPr>
+            <a:spLocks noGrp="1" noRot="1" noChangeAspect="1"/>
+          </p:cNvSpPr>
+          <p:nvPr>
+            <p:ph type="sldImg"/>
+          </p:nvPr>
+        </p:nvSpPr>
+        <p:spPr/>
+      </p:sp>
+      <p:sp>
+        <p:nvSpPr>
+          <p:cNvPr id="3" name="Notes Placeholder 2"/>
+          <p:cNvSpPr>
+            <a:spLocks noGrp="1"/>
+          </p:cNvSpPr>
+          <p:nvPr>
+            <p:ph type="body" idx="1"/>
+          </p:nvPr>
+        </p:nvSpPr>
+        <p:spPr/>
+        <p:txBody>
+          <a:bodyPr/>
+          <a:lstStyle/>
+          <a:p>
+            <a:r>
+              <a:rPr lang="en-US" dirty="0"/>
+              <a:t>Close on intent, not on modesty. The seniority question is answered by saying plainly that I am optimizing for direction and team, not title.</a:t>
+            </a:r>
+            <a:endParaRPr lang="en-US" dirty="0"/>
+          </a:p>
+        </p:txBody>
+      </p:sp>
+      <p:sp>
+        <p:nvSpPr>
+          <p:cNvPr id="4" name="Slide Number Placeholder 3"/>
+          <p:cNvSpPr>
+            <a:spLocks noGrp="1"/>
+          </p:cNvSpPr>
+          <p:nvPr>
+            <p:ph type="sldNum" sz="quarter" idx="10"/>
+          </p:nvPr>
+        </p:nvSpPr>
+        <p:spPr/>
+        <p:txBody>
+          <a:bodyPr/>
+          <a:lstStyle/>
+          <a:p>
+            <a:fld id="{F7021451-1387-4CA6-816F-3879F97B5CBC}" type="slidenum">
+              <a:rPr lang="en-US"/>
+              <a:t>16</a:t>
             </a:fld>
             <a:endParaRPr lang="en-US"/>
           </a:p>
@@ -3441,7 +3530,7 @@
                 <a:ea typeface="Cambria" pitchFamily="34" charset="-122"/>
                 <a:cs typeface="Cambria" pitchFamily="34" charset="-120"/>
               </a:rPr>
-              <a:t>47</a:t>
+              <a:t>65</a:t>
             </a:r>
             <a:endParaRPr lang="en-US" sz="3000" dirty="0"/>
           </a:p>
@@ -3480,7 +3569,7 @@
                 <a:ea typeface="Calibri" pitchFamily="34" charset="-122"/>
                 <a:cs typeface="Calibri" pitchFamily="34" charset="-120"/>
               </a:rPr>
-              <a:t>tests, including the governance layer</a:t>
+              <a:t>tests, including the governance and evidence layers</a:t>
             </a:r>
             <a:endParaRPr lang="en-US" sz="1150" dirty="0"/>
           </a:p>
@@ -5885,7 +5974,7 @@
                 <a:ea typeface="Calibri" pitchFamily="34" charset="-122"/>
                 <a:cs typeface="Calibri" pitchFamily="34" charset="-120"/>
               </a:rPr>
-              <a:t>Plans stop at awaiting_device_implementation. There are no hydride synthesis devices here and none will be fabricated — simulating a hydrogenation anneal would be exactly the fake physics this project refuses. The seam sits where a real lab's seam sits.</a:t>
+              <a:t>Plans stop at awaiting_device_implementation — no hydride synthesis is simulated, because there is no honest way to. That is the forward path. What comes back across the same seam is the next slide.</a:t>
             </a:r>
             <a:endParaRPr lang="en-US" sz="1150" dirty="0"/>
           </a:p>
@@ -5932,135 +6021,7 @@
         <p:spPr>
           <a:xfrm>
             <a:off x="566928" y="384048"/>
-            <a:ext cx="4087368" cy="292608"/>
-          </a:xfrm>
-          <a:prstGeom prst="roundRect">
-            <a:avLst>
-              <a:gd name="adj" fmla="val 50000"/>
-            </a:avLst>
-          </a:prstGeom>
-          <a:solidFill>
-            <a:srgbClr val="1F5F8B"/>
-          </a:solidFill>
-          <a:ln w="12700">
-            <a:solidFill>
-              <a:srgbClr val="1F5F8B"/>
-            </a:solidFill>
-            <a:prstDash val="solid"/>
-          </a:ln>
-        </p:spPr>
-      </p:sp>
-      <p:sp>
-        <p:nvSpPr>
-          <p:cNvPr id="3" name="Text 1"/>
-          <p:cNvSpPr txBox="1"/>
-          <p:nvPr/>
-        </p:nvSpPr>
-        <p:spPr>
-          <a:xfrm>
-            <a:off x="566928" y="384048"/>
-            <a:ext cx="4087368" cy="292608"/>
-          </a:xfrm>
-          <a:prstGeom prst="rect">
-            <a:avLst/>
-          </a:prstGeom>
-          <a:noFill/>
-          <a:ln/>
-        </p:spPr>
-        <p:txBody>
-          <a:bodyPr wrap="square" lIns="0" tIns="0" rIns="0" bIns="0" rtlCol="0" anchor="ctr"/>
-          <a:lstStyle/>
-          <a:p>
-            <a:pPr algn="ctr" indent="0" marL="0">
-              <a:buNone/>
-            </a:pPr>
-            <a:r>
-              <a:rPr lang="en-US" sz="1050" b="1" spc="120" kern="0" dirty="0">
-                <a:solidFill>
-                  <a:srgbClr val="FFFFFF"/>
-                </a:solidFill>
-                <a:latin typeface="Calibri" pitchFamily="34" charset="0"/>
-                <a:ea typeface="Calibri" pitchFamily="34" charset="-122"/>
-                <a:cs typeface="Calibri" pitchFamily="34" charset="-120"/>
-              </a:rPr>
-              <a:t>11  ·  THE OPERATOR SURFACE</a:t>
-            </a:r>
-            <a:endParaRPr lang="en-US" sz="1050" dirty="0"/>
-          </a:p>
-        </p:txBody>
-      </p:sp>
-      <p:sp>
-        <p:nvSpPr>
-          <p:cNvPr id="4" name="Text 2"/>
-          <p:cNvSpPr txBox="1"/>
-          <p:nvPr/>
-        </p:nvSpPr>
-        <p:spPr>
-          <a:xfrm>
-            <a:off x="566928" y="868680"/>
-            <a:ext cx="11055096" cy="749808"/>
-          </a:xfrm>
-          <a:prstGeom prst="rect">
-            <a:avLst/>
-          </a:prstGeom>
-          <a:noFill/>
-          <a:ln/>
-        </p:spPr>
-        <p:txBody>
-          <a:bodyPr wrap="square" lIns="0" tIns="0" rIns="0" bIns="0" rtlCol="0" anchor="ctr"/>
-          <a:lstStyle/>
-          <a:p>
-            <a:pPr indent="0" marL="0">
-              <a:buNone/>
-            </a:pPr>
-            <a:r>
-              <a:rPr lang="en-US" sz="3400" b="1" dirty="0">
-                <a:solidFill>
-                  <a:srgbClr val="18222B"/>
-                </a:solidFill>
-                <a:latin typeface="Cambria" pitchFamily="34" charset="0"/>
-                <a:ea typeface="Cambria" pitchFamily="34" charset="-122"/>
-                <a:cs typeface="Cambria" pitchFamily="34" charset="-120"/>
-              </a:rPr>
-              <a:t>Where a person actually meets the loop</a:t>
-            </a:r>
-            <a:endParaRPr lang="en-US" sz="3400" dirty="0"/>
-          </a:p>
-        </p:txBody>
-      </p:sp>
-      <p:pic>
-        <p:nvPicPr>
-          <p:cNvPr id="5" name="Image 0" descr="/Users/xtc/Downloads/ai-to-lab-orchestrator/docs/mockups/bench_review_shot.png">    </p:cNvPr>
-          <p:cNvPicPr>
-            <a:picLocks noChangeAspect="1"/>
-          </p:cNvPicPr>
-          <p:nvPr/>
-        </p:nvPicPr>
-        <p:blipFill>
-          <a:blip r:embed="rId1"/>
-          <a:srcRect l="0" r="0" t="0" b="0"/>
-          <a:stretch/>
-        </p:blipFill>
-        <p:spPr>
-          <a:xfrm>
-            <a:off x="566928" y="1783080"/>
-            <a:ext cx="6766560" cy="4434840"/>
-          </a:xfrm>
-          <a:prstGeom prst="rect">
-            <a:avLst/>
-          </a:prstGeom>
-        </p:spPr>
-      </p:pic>
-      <p:sp>
-        <p:nvSpPr>
-          <p:cNvPr id="6" name="Shape 3"/>
-          <p:cNvSpPr/>
-          <p:nvPr/>
-        </p:nvSpPr>
-        <p:spPr>
-          <a:xfrm>
-            <a:off x="7589520" y="1865376"/>
-            <a:ext cx="237744" cy="237744"/>
+            <a:ext cx="3538728" cy="292608"/>
           </a:xfrm>
           <a:prstGeom prst="roundRect">
             <a:avLst>
@@ -6080,30 +6041,69 @@
       </p:sp>
       <p:sp>
         <p:nvSpPr>
-          <p:cNvPr id="7" name="Text 4"/>
-          <p:cNvSpPr txBox="1"/>
-          <p:nvPr/>
-        </p:nvSpPr>
-        <p:spPr>
-          <a:xfrm>
-            <a:off x="7973568" y="1828800"/>
-            <a:ext cx="3657600" cy="310896"/>
-          </a:xfrm>
-          <a:prstGeom prst="rect">
-            <a:avLst/>
-          </a:prstGeom>
-          <a:noFill/>
-          <a:ln/>
-        </p:spPr>
-        <p:txBody>
-          <a:bodyPr wrap="square" lIns="0" tIns="0" rIns="0" bIns="0" rtlCol="0" anchor="ctr"/>
-          <a:lstStyle/>
-          <a:p>
-            <a:pPr indent="0" marL="0">
-              <a:buNone/>
-            </a:pPr>
-            <a:r>
-              <a:rPr lang="en-US" sz="1400" b="1" dirty="0">
+          <p:cNvPr id="3" name="Text 1"/>
+          <p:cNvSpPr txBox="1"/>
+          <p:nvPr/>
+        </p:nvSpPr>
+        <p:spPr>
+          <a:xfrm>
+            <a:off x="566928" y="384048"/>
+            <a:ext cx="3538728" cy="292608"/>
+          </a:xfrm>
+          <a:prstGeom prst="rect">
+            <a:avLst/>
+          </a:prstGeom>
+          <a:noFill/>
+          <a:ln/>
+        </p:spPr>
+        <p:txBody>
+          <a:bodyPr wrap="square" lIns="0" tIns="0" rIns="0" bIns="0" rtlCol="0" anchor="ctr"/>
+          <a:lstStyle/>
+          <a:p>
+            <a:pPr algn="ctr" indent="0" marL="0">
+              <a:buNone/>
+            </a:pPr>
+            <a:r>
+              <a:rPr lang="en-US" sz="1050" b="1" spc="120" kern="0" dirty="0">
+                <a:solidFill>
+                  <a:srgbClr val="FFFFFF"/>
+                </a:solidFill>
+                <a:latin typeface="Calibri" pitchFamily="34" charset="0"/>
+                <a:ea typeface="Calibri" pitchFamily="34" charset="-122"/>
+                <a:cs typeface="Calibri" pitchFamily="34" charset="-120"/>
+              </a:rPr>
+              <a:t>11  ·  CLOSING THE LOOP</a:t>
+            </a:r>
+            <a:endParaRPr lang="en-US" sz="1050" dirty="0"/>
+          </a:p>
+        </p:txBody>
+      </p:sp>
+      <p:sp>
+        <p:nvSpPr>
+          <p:cNvPr id="4" name="Text 2"/>
+          <p:cNvSpPr txBox="1"/>
+          <p:nvPr/>
+        </p:nvSpPr>
+        <p:spPr>
+          <a:xfrm>
+            <a:off x="566928" y="868680"/>
+            <a:ext cx="11055096" cy="749808"/>
+          </a:xfrm>
+          <a:prstGeom prst="rect">
+            <a:avLst/>
+          </a:prstGeom>
+          <a:noFill/>
+          <a:ln/>
+        </p:spPr>
+        <p:txBody>
+          <a:bodyPr wrap="square" lIns="0" tIns="0" rIns="0" bIns="0" rtlCol="0" anchor="ctr"/>
+          <a:lstStyle/>
+          <a:p>
+            <a:pPr indent="0" marL="0">
+              <a:buNone/>
+            </a:pPr>
+            <a:r>
+              <a:rPr lang="en-US" sz="3400" b="1" dirty="0">
                 <a:solidFill>
                   <a:srgbClr val="18222B"/>
                 </a:solidFill>
@@ -6111,22 +6111,22 @@
                 <a:ea typeface="Cambria" pitchFamily="34" charset="-122"/>
                 <a:cs typeface="Cambria" pitchFamily="34" charset="-120"/>
               </a:rPr>
-              <a:t>The approval queue is the hero</a:t>
-            </a:r>
-            <a:endParaRPr lang="en-US" sz="1400" dirty="0"/>
-          </a:p>
-        </p:txBody>
-      </p:sp>
-      <p:sp>
-        <p:nvSpPr>
-          <p:cNvPr id="8" name="Text 5"/>
-          <p:cNvSpPr txBox="1"/>
-          <p:nvPr/>
-        </p:nvSpPr>
-        <p:spPr>
-          <a:xfrm>
-            <a:off x="7973568" y="2176272"/>
-            <a:ext cx="3657600" cy="1005840"/>
+              <a:t>A measurement changes the ranking that proposed it</a:t>
+            </a:r>
+            <a:endParaRPr lang="en-US" sz="3400" dirty="0"/>
+          </a:p>
+        </p:txBody>
+      </p:sp>
+      <p:sp>
+        <p:nvSpPr>
+          <p:cNvPr id="5" name="Text 3"/>
+          <p:cNvSpPr txBox="1"/>
+          <p:nvPr/>
+        </p:nvSpPr>
+        <p:spPr>
+          <a:xfrm>
+            <a:off x="566928" y="1572768"/>
+            <a:ext cx="11055096" cy="420624"/>
           </a:xfrm>
           <a:prstGeom prst="rect">
             <a:avLst/>
@@ -6140,12 +6140,12 @@
           <a:p>
             <a:pPr indent="0" marL="0">
               <a:lnSpc>
-                <a:spcPts val="1500"/>
+                <a:spcPts val="2000"/>
               </a:lnSpc>
               <a:buNone/>
             </a:pPr>
             <a:r>
-              <a:rPr lang="en-US" sz="1100" dirty="0">
+              <a:rPr lang="en-US" sz="1450" dirty="0">
                 <a:solidFill>
                   <a:srgbClr val="5B6B78"/>
                 </a:solidFill>
@@ -6153,34 +6153,74 @@
                 <a:ea typeface="Calibri" pitchFamily="34" charset="-122"/>
                 <a:cs typeface="Calibri" pitchFamily="34" charset="-120"/>
               </a:rPr>
-              <a:t>The held experiment is the only thing on the loop that needs a human. Everything else — proposing, executing, logging — does not. Putting approval anywhere but first would mean missing why this screen exists.</a:t>
-            </a:r>
-            <a:endParaRPr lang="en-US" sz="1100" dirty="0"/>
-          </a:p>
-        </p:txBody>
-      </p:sp>
-      <p:sp>
-        <p:nvSpPr>
-          <p:cNvPr id="9" name="Shape 6"/>
+              <a:t>Evidence is received, never manufactured. There are no hydride devices, so records enter from</a:t>
+            </a:r>
+            <a:endParaRPr lang="en-US" sz="1450" dirty="0"/>
+          </a:p>
+          <a:p>
+            <a:pPr indent="0" marL="0">
+              <a:lnSpc>
+                <a:spcPts val="2000"/>
+              </a:lnSpc>
+              <a:buNone/>
+            </a:pPr>
+            <a:r>
+              <a:rPr lang="en-US" sz="1450" dirty="0">
+                <a:solidFill>
+                  <a:srgbClr val="5B6B78"/>
+                </a:solidFill>
+                <a:latin typeface="Calibri" pitchFamily="34" charset="0"/>
+                <a:ea typeface="Calibri" pitchFamily="34" charset="-122"/>
+                <a:cs typeface="Calibri" pitchFamily="34" charset="-120"/>
+              </a:rPr>
+              <a:t>outside — an instrument, a collaborator, a paper. A record with no named recorder or stated source</a:t>
+            </a:r>
+            <a:endParaRPr lang="en-US" sz="1450" dirty="0"/>
+          </a:p>
+          <a:p>
+            <a:pPr indent="0" marL="0">
+              <a:lnSpc>
+                <a:spcPts val="2000"/>
+              </a:lnSpc>
+              <a:buNone/>
+            </a:pPr>
+            <a:r>
+              <a:rPr lang="en-US" sz="1450" dirty="0">
+                <a:solidFill>
+                  <a:srgbClr val="5B6B78"/>
+                </a:solidFill>
+                <a:latin typeface="Calibri" pitchFamily="34" charset="0"/>
+                <a:ea typeface="Calibri" pitchFamily="34" charset="-122"/>
+                <a:cs typeface="Calibri" pitchFamily="34" charset="-120"/>
+              </a:rPr>
+              <a:t>is rejected at load: a measurement nobody will sign for cannot overturn a prediction.</a:t>
+            </a:r>
+            <a:endParaRPr lang="en-US" sz="1450" dirty="0"/>
+          </a:p>
+        </p:txBody>
+      </p:sp>
+      <p:sp>
+        <p:nvSpPr>
+          <p:cNvPr id="6" name="Shape 4"/>
           <p:cNvSpPr/>
           <p:nvPr/>
         </p:nvSpPr>
         <p:spPr>
           <a:xfrm>
-            <a:off x="7589520" y="3346704"/>
-            <a:ext cx="237744" cy="237744"/>
+            <a:off x="566928" y="2880360"/>
+            <a:ext cx="5486400" cy="1481328"/>
           </a:xfrm>
           <a:prstGeom prst="roundRect">
             <a:avLst>
-              <a:gd name="adj" fmla="val 50000"/>
+              <a:gd name="adj" fmla="val 4938"/>
             </a:avLst>
           </a:prstGeom>
           <a:solidFill>
-            <a:srgbClr val="C2410C"/>
+            <a:srgbClr val="FDEEE6"/>
           </a:solidFill>
-          <a:ln w="12700">
+          <a:ln w="9525">
             <a:solidFill>
-              <a:srgbClr val="C2410C"/>
+              <a:srgbClr val="F0C4AE"/>
             </a:solidFill>
             <a:prstDash val="solid"/>
           </a:ln>
@@ -6188,53 +6228,53 @@
       </p:sp>
       <p:sp>
         <p:nvSpPr>
-          <p:cNvPr id="10" name="Text 7"/>
-          <p:cNvSpPr txBox="1"/>
-          <p:nvPr/>
-        </p:nvSpPr>
-        <p:spPr>
-          <a:xfrm>
-            <a:off x="7973568" y="3310128"/>
-            <a:ext cx="3657600" cy="310896"/>
-          </a:xfrm>
-          <a:prstGeom prst="rect">
-            <a:avLst/>
-          </a:prstGeom>
-          <a:noFill/>
-          <a:ln/>
-        </p:spPr>
-        <p:txBody>
-          <a:bodyPr wrap="square" lIns="0" tIns="0" rIns="0" bIns="0" rtlCol="0" anchor="ctr"/>
-          <a:lstStyle/>
-          <a:p>
-            <a:pPr indent="0" marL="0">
-              <a:buNone/>
-            </a:pPr>
-            <a:r>
-              <a:rPr lang="en-US" sz="1400" b="1" dirty="0">
-                <a:solidFill>
-                  <a:srgbClr val="18222B"/>
+          <p:cNvPr id="7" name="Text 5"/>
+          <p:cNvSpPr txBox="1"/>
+          <p:nvPr/>
+        </p:nvSpPr>
+        <p:spPr>
+          <a:xfrm>
+            <a:off x="859536" y="3054096"/>
+            <a:ext cx="4937760" cy="292608"/>
+          </a:xfrm>
+          <a:prstGeom prst="rect">
+            <a:avLst/>
+          </a:prstGeom>
+          <a:noFill/>
+          <a:ln/>
+        </p:spPr>
+        <p:txBody>
+          <a:bodyPr wrap="square" lIns="0" tIns="0" rIns="0" bIns="0" rtlCol="0" anchor="ctr"/>
+          <a:lstStyle/>
+          <a:p>
+            <a:pPr indent="0" marL="0">
+              <a:buNone/>
+            </a:pPr>
+            <a:r>
+              <a:rPr lang="en-US" sz="1500" b="1" dirty="0">
+                <a:solidFill>
+                  <a:srgbClr val="C2410C"/>
                 </a:solidFill>
                 <a:latin typeface="Cambria" pitchFamily="34" charset="0"/>
                 <a:ea typeface="Cambria" pitchFamily="34" charset="-122"/>
                 <a:cs typeface="Cambria" pitchFamily="34" charset="-120"/>
               </a:rPr>
-              <a:t>Every value is real output</a:t>
-            </a:r>
-            <a:endParaRPr lang="en-US" sz="1400" dirty="0"/>
-          </a:p>
-        </p:txBody>
-      </p:sp>
-      <p:sp>
-        <p:nvSpPr>
-          <p:cNvPr id="11" name="Text 8"/>
-          <p:cNvSpPr txBox="1"/>
-          <p:nvPr/>
-        </p:nvSpPr>
-        <p:spPr>
-          <a:xfrm>
-            <a:off x="7973568" y="3657600"/>
-            <a:ext cx="3657600" cy="1005840"/>
+              <a:t>A null result is meaningless without its floor</a:t>
+            </a:r>
+            <a:endParaRPr lang="en-US" sz="1500" dirty="0"/>
+          </a:p>
+        </p:txBody>
+      </p:sp>
+      <p:sp>
+        <p:nvSpPr>
+          <p:cNvPr id="8" name="Text 6"/>
+          <p:cNvSpPr txBox="1"/>
+          <p:nvPr/>
+        </p:nvSpPr>
+        <p:spPr>
+          <a:xfrm>
+            <a:off x="859536" y="3383280"/>
+            <a:ext cx="4937760" cy="868680"/>
           </a:xfrm>
           <a:prstGeom prst="rect">
             <a:avLst/>
@@ -6248,47 +6288,47 @@
           <a:p>
             <a:pPr indent="0" marL="0">
               <a:lnSpc>
-                <a:spcPts val="1500"/>
+                <a:spcPts val="1450"/>
               </a:lnSpc>
               <a:buNone/>
             </a:pPr>
             <a:r>
-              <a:rPr lang="en-US" sz="1100" dirty="0">
-                <a:solidFill>
-                  <a:srgbClr val="5B6B78"/>
-                </a:solidFill>
-                <a:latin typeface="Calibri" pitchFamily="34" charset="0"/>
-                <a:ea typeface="Calibri" pitchFamily="34" charset="-122"/>
-                <a:cs typeface="Calibri" pitchFamily="34" charset="-120"/>
-              </a:rPr>
-              <a:t>The held parameters, the triggered rule, the measurements, the objective breakdown and both artefacts are genuine system output, not illustration.</a:t>
-            </a:r>
-            <a:endParaRPr lang="en-US" sz="1100" dirty="0"/>
-          </a:p>
-        </p:txBody>
-      </p:sp>
-      <p:sp>
-        <p:nvSpPr>
-          <p:cNvPr id="12" name="Shape 9"/>
+              <a:rPr lang="en-US" sz="1050" dirty="0">
+                <a:solidFill>
+                  <a:srgbClr val="18222B"/>
+                </a:solidFill>
+                <a:latin typeface="Calibri" pitchFamily="34" charset="0"/>
+                <a:ea typeface="Calibri" pitchFamily="34" charset="-122"/>
+                <a:cs typeface="Calibri" pitchFamily="34" charset="-120"/>
+              </a:rPr>
+              <a:t>Ta6MoH16: no transition seen — but the rig reached only 8 K and the prediction is 7.3 K. The run could not have observed what it was testing, so it refutes nothing. Marked inconclusive, excluded from the calibration, and its hypothesis stays open.</a:t>
+            </a:r>
+            <a:endParaRPr lang="en-US" sz="1050" dirty="0"/>
+          </a:p>
+        </p:txBody>
+      </p:sp>
+      <p:sp>
+        <p:nvSpPr>
+          <p:cNvPr id="9" name="Shape 7"/>
           <p:cNvSpPr/>
           <p:nvPr/>
         </p:nvSpPr>
         <p:spPr>
           <a:xfrm>
-            <a:off x="7589520" y="4828032"/>
-            <a:ext cx="237744" cy="237744"/>
+            <a:off x="566928" y="4498848"/>
+            <a:ext cx="5486400" cy="1353312"/>
           </a:xfrm>
           <a:prstGeom prst="roundRect">
             <a:avLst>
-              <a:gd name="adj" fmla="val 50000"/>
+              <a:gd name="adj" fmla="val 5405"/>
             </a:avLst>
           </a:prstGeom>
           <a:solidFill>
-            <a:srgbClr val="C2410C"/>
+            <a:srgbClr val="FFFFFF"/>
           </a:solidFill>
-          <a:ln w="12700">
+          <a:ln w="9525">
             <a:solidFill>
-              <a:srgbClr val="C2410C"/>
+              <a:srgbClr val="D4DCE3"/>
             </a:solidFill>
             <a:prstDash val="solid"/>
           </a:ln>
@@ -6296,53 +6336,53 @@
       </p:sp>
       <p:sp>
         <p:nvSpPr>
-          <p:cNvPr id="13" name="Text 10"/>
-          <p:cNvSpPr txBox="1"/>
-          <p:nvPr/>
-        </p:nvSpPr>
-        <p:spPr>
-          <a:xfrm>
-            <a:off x="7973568" y="4791456"/>
-            <a:ext cx="3657600" cy="310896"/>
-          </a:xfrm>
-          <a:prstGeom prst="rect">
-            <a:avLst/>
-          </a:prstGeom>
-          <a:noFill/>
-          <a:ln/>
-        </p:spPr>
-        <p:txBody>
-          <a:bodyPr wrap="square" lIns="0" tIns="0" rIns="0" bIns="0" rtlCol="0" anchor="ctr"/>
-          <a:lstStyle/>
-          <a:p>
-            <a:pPr indent="0" marL="0">
-              <a:buNone/>
-            </a:pPr>
-            <a:r>
-              <a:rPr lang="en-US" sz="1400" b="1" dirty="0">
-                <a:solidFill>
-                  <a:srgbClr val="18222B"/>
+          <p:cNvPr id="10" name="Text 8"/>
+          <p:cNvSpPr txBox="1"/>
+          <p:nvPr/>
+        </p:nvSpPr>
+        <p:spPr>
+          <a:xfrm>
+            <a:off x="859536" y="4672584"/>
+            <a:ext cx="4937760" cy="292608"/>
+          </a:xfrm>
+          <a:prstGeom prst="rect">
+            <a:avLst/>
+          </a:prstGeom>
+          <a:noFill/>
+          <a:ln/>
+        </p:spPr>
+        <p:txBody>
+          <a:bodyPr wrap="square" lIns="0" tIns="0" rIns="0" bIns="0" rtlCol="0" anchor="ctr"/>
+          <a:lstStyle/>
+          <a:p>
+            <a:pPr indent="0" marL="0">
+              <a:buNone/>
+            </a:pPr>
+            <a:r>
+              <a:rPr lang="en-US" sz="1500" b="1" dirty="0">
+                <a:solidFill>
+                  <a:srgbClr val="1F5F8B"/>
                 </a:solidFill>
                 <a:latin typeface="Cambria" pitchFamily="34" charset="0"/>
                 <a:ea typeface="Cambria" pitchFamily="34" charset="-122"/>
                 <a:cs typeface="Cambria" pitchFamily="34" charset="-120"/>
               </a:rPr>
-              <a:t>Sized for gloved hands</a:t>
-            </a:r>
-            <a:endParaRPr lang="en-US" sz="1400" dirty="0"/>
-          </a:p>
-        </p:txBody>
-      </p:sp>
-      <p:sp>
-        <p:nvSpPr>
-          <p:cNvPr id="14" name="Text 11"/>
-          <p:cNvSpPr txBox="1"/>
-          <p:nvPr/>
-        </p:nvSpPr>
-        <p:spPr>
-          <a:xfrm>
-            <a:off x="7973568" y="5138928"/>
-            <a:ext cx="3657600" cy="1005840"/>
+              <a:t>Evidence about one compound calibrates the method</a:t>
+            </a:r>
+            <a:endParaRPr lang="en-US" sz="1500" dirty="0"/>
+          </a:p>
+        </p:txBody>
+      </p:sp>
+      <p:sp>
+        <p:nvSpPr>
+          <p:cNvPr id="11" name="Text 9"/>
+          <p:cNvSpPr txBox="1"/>
+          <p:nvPr/>
+        </p:nvSpPr>
+        <p:spPr>
+          <a:xfrm>
+            <a:off x="859536" y="5001768"/>
+            <a:ext cx="4937760" cy="749808"/>
           </a:xfrm>
           <a:prstGeom prst="rect">
             <a:avLst/>
@@ -6356,12 +6396,117 @@
           <a:p>
             <a:pPr indent="0" marL="0">
               <a:lnSpc>
-                <a:spcPts val="1500"/>
+                <a:spcPts val="1450"/>
               </a:lnSpc>
               <a:buNone/>
             </a:pPr>
             <a:r>
-              <a:rPr lang="en-US" sz="1100" dirty="0">
+              <a:rPr lang="en-US" sz="1050" dirty="0">
+                <a:solidFill>
+                  <a:srgbClr val="18222B"/>
+                </a:solidFill>
+                <a:latin typeface="Calibri" pitchFamily="34" charset="0"/>
+                <a:ea typeface="Calibri" pitchFamily="34" charset="-122"/>
+                <a:cs typeface="Calibri" pitchFamily="34" charset="-120"/>
+              </a:rPr>
+              <a:t>21 of 22 candidates rest on Allen–Dynes alone. On 2 conclusive measurement(s), Allen–Dynes runs 28% high (median observed/predicted = 0.72). Confidence in every un-measured Allen–Dynes prediction is reduced by 14%. A calibration lowers confidence and never rewrites a prediction — a "corrected" Tc would invent a number nobody computed.</a:t>
+            </a:r>
+            <a:endParaRPr lang="en-US" sz="1050" dirty="0"/>
+          </a:p>
+        </p:txBody>
+      </p:sp>
+      <p:sp>
+        <p:nvSpPr>
+          <p:cNvPr id="12" name="Shape 10"/>
+          <p:cNvSpPr/>
+          <p:nvPr/>
+        </p:nvSpPr>
+        <p:spPr>
+          <a:xfrm>
+            <a:off x="6492240" y="2880360"/>
+            <a:ext cx="5120640" cy="2971800"/>
+          </a:xfrm>
+          <a:prstGeom prst="roundRect">
+            <a:avLst>
+              <a:gd name="adj" fmla="val 2462"/>
+            </a:avLst>
+          </a:prstGeom>
+          <a:solidFill>
+            <a:srgbClr val="FFFFFF"/>
+          </a:solidFill>
+          <a:ln w="9525">
+            <a:solidFill>
+              <a:srgbClr val="D4DCE3"/>
+            </a:solidFill>
+            <a:prstDash val="solid"/>
+          </a:ln>
+        </p:spPr>
+      </p:sp>
+      <p:sp>
+        <p:nvSpPr>
+          <p:cNvPr id="13" name="Text 11"/>
+          <p:cNvSpPr txBox="1"/>
+          <p:nvPr/>
+        </p:nvSpPr>
+        <p:spPr>
+          <a:xfrm>
+            <a:off x="6784848" y="3072384"/>
+            <a:ext cx="4572000" cy="292608"/>
+          </a:xfrm>
+          <a:prstGeom prst="rect">
+            <a:avLst/>
+          </a:prstGeom>
+          <a:noFill/>
+          <a:ln/>
+        </p:spPr>
+        <p:txBody>
+          <a:bodyPr wrap="square" lIns="0" tIns="0" rIns="0" bIns="0" rtlCol="0" anchor="ctr"/>
+          <a:lstStyle/>
+          <a:p>
+            <a:pPr indent="0" marL="0">
+              <a:buNone/>
+            </a:pPr>
+            <a:r>
+              <a:rPr lang="en-US" sz="1500" b="1" dirty="0">
+                <a:solidFill>
+                  <a:srgbClr val="18222B"/>
+                </a:solidFill>
+                <a:latin typeface="Cambria" pitchFamily="34" charset="0"/>
+                <a:ea typeface="Cambria" pitchFamily="34" charset="-122"/>
+                <a:cs typeface="Cambria" pitchFamily="34" charset="-120"/>
+              </a:rPr>
+              <a:t>The cohort re-ranks</a:t>
+            </a:r>
+            <a:endParaRPr lang="en-US" sz="1500" dirty="0"/>
+          </a:p>
+        </p:txBody>
+      </p:sp>
+      <p:sp>
+        <p:nvSpPr>
+          <p:cNvPr id="14" name="Text 12"/>
+          <p:cNvSpPr txBox="1"/>
+          <p:nvPr/>
+        </p:nvSpPr>
+        <p:spPr>
+          <a:xfrm>
+            <a:off x="6784848" y="3438144"/>
+            <a:ext cx="1920240" cy="237744"/>
+          </a:xfrm>
+          <a:prstGeom prst="rect">
+            <a:avLst/>
+          </a:prstGeom>
+          <a:noFill/>
+          <a:ln/>
+        </p:spPr>
+        <p:txBody>
+          <a:bodyPr wrap="square" lIns="0" tIns="0" rIns="0" bIns="0" rtlCol="0" anchor="ctr"/>
+          <a:lstStyle/>
+          <a:p>
+            <a:pPr algn="l" indent="0" marL="0">
+              <a:buNone/>
+            </a:pPr>
+            <a:r>
+              <a:rPr lang="en-US" sz="950" b="1" dirty="0">
                 <a:solidFill>
                   <a:srgbClr val="5B6B78"/>
                 </a:solidFill>
@@ -6369,22 +6514,1075 @@
                 <a:ea typeface="Calibri" pitchFamily="34" charset="-122"/>
                 <a:cs typeface="Calibri" pitchFamily="34" charset="-120"/>
               </a:rPr>
-              <a:t>60px touch targets, no text entry, high contrast. A tablet at the bench, not a dashboard at a desk.</a:t>
-            </a:r>
-            <a:endParaRPr lang="en-US" sz="1100" dirty="0"/>
-          </a:p>
-        </p:txBody>
-      </p:sp>
-      <p:sp>
-        <p:nvSpPr>
-          <p:cNvPr id="15" name="Text 12"/>
-          <p:cNvSpPr txBox="1"/>
-          <p:nvPr/>
-        </p:nvSpPr>
-        <p:spPr>
-          <a:xfrm>
-            <a:off x="7973568" y="5943600"/>
-            <a:ext cx="3657600" cy="914400"/>
+              <a:t>Candidate</a:t>
+            </a:r>
+            <a:endParaRPr lang="en-US" sz="950" dirty="0"/>
+          </a:p>
+        </p:txBody>
+      </p:sp>
+      <p:sp>
+        <p:nvSpPr>
+          <p:cNvPr id="15" name="Text 13"/>
+          <p:cNvSpPr txBox="1"/>
+          <p:nvPr/>
+        </p:nvSpPr>
+        <p:spPr>
+          <a:xfrm>
+            <a:off x="8759952" y="3438144"/>
+            <a:ext cx="731520" cy="237744"/>
+          </a:xfrm>
+          <a:prstGeom prst="rect">
+            <a:avLst/>
+          </a:prstGeom>
+          <a:noFill/>
+          <a:ln/>
+        </p:spPr>
+        <p:txBody>
+          <a:bodyPr wrap="square" lIns="0" tIns="0" rIns="0" bIns="0" rtlCol="0" anchor="ctr"/>
+          <a:lstStyle/>
+          <a:p>
+            <a:pPr algn="ctr" indent="0" marL="0">
+              <a:buNone/>
+            </a:pPr>
+            <a:r>
+              <a:rPr lang="en-US" sz="950" b="1" dirty="0">
+                <a:solidFill>
+                  <a:srgbClr val="5B6B78"/>
+                </a:solidFill>
+                <a:latin typeface="Calibri" pitchFamily="34" charset="0"/>
+                <a:ea typeface="Calibri" pitchFamily="34" charset="-122"/>
+                <a:cs typeface="Calibri" pitchFamily="34" charset="-120"/>
+              </a:rPr>
+              <a:t>was</a:t>
+            </a:r>
+            <a:endParaRPr lang="en-US" sz="950" dirty="0"/>
+          </a:p>
+        </p:txBody>
+      </p:sp>
+      <p:sp>
+        <p:nvSpPr>
+          <p:cNvPr id="16" name="Text 14"/>
+          <p:cNvSpPr txBox="1"/>
+          <p:nvPr/>
+        </p:nvSpPr>
+        <p:spPr>
+          <a:xfrm>
+            <a:off x="9528048" y="3438144"/>
+            <a:ext cx="731520" cy="237744"/>
+          </a:xfrm>
+          <a:prstGeom prst="rect">
+            <a:avLst/>
+          </a:prstGeom>
+          <a:noFill/>
+          <a:ln/>
+        </p:spPr>
+        <p:txBody>
+          <a:bodyPr wrap="square" lIns="0" tIns="0" rIns="0" bIns="0" rtlCol="0" anchor="ctr"/>
+          <a:lstStyle/>
+          <a:p>
+            <a:pPr algn="ctr" indent="0" marL="0">
+              <a:buNone/>
+            </a:pPr>
+            <a:r>
+              <a:rPr lang="en-US" sz="950" b="1" dirty="0">
+                <a:solidFill>
+                  <a:srgbClr val="5B6B78"/>
+                </a:solidFill>
+                <a:latin typeface="Calibri" pitchFamily="34" charset="0"/>
+                <a:ea typeface="Calibri" pitchFamily="34" charset="-122"/>
+                <a:cs typeface="Calibri" pitchFamily="34" charset="-120"/>
+              </a:rPr>
+              <a:t>now</a:t>
+            </a:r>
+            <a:endParaRPr lang="en-US" sz="950" dirty="0"/>
+          </a:p>
+        </p:txBody>
+      </p:sp>
+      <p:sp>
+        <p:nvSpPr>
+          <p:cNvPr id="17" name="Text 15"/>
+          <p:cNvSpPr txBox="1"/>
+          <p:nvPr/>
+        </p:nvSpPr>
+        <p:spPr>
+          <a:xfrm>
+            <a:off x="10332720" y="3438144"/>
+            <a:ext cx="1280160" cy="237744"/>
+          </a:xfrm>
+          <a:prstGeom prst="rect">
+            <a:avLst/>
+          </a:prstGeom>
+          <a:noFill/>
+          <a:ln/>
+        </p:spPr>
+        <p:txBody>
+          <a:bodyPr wrap="square" lIns="0" tIns="0" rIns="0" bIns="0" rtlCol="0" anchor="ctr"/>
+          <a:lstStyle/>
+          <a:p>
+            <a:pPr algn="l" indent="0" marL="0">
+              <a:buNone/>
+            </a:pPr>
+            <a:r>
+              <a:rPr lang="en-US" sz="950" b="1" dirty="0">
+                <a:solidFill>
+                  <a:srgbClr val="5B6B78"/>
+                </a:solidFill>
+                <a:latin typeface="Calibri" pitchFamily="34" charset="0"/>
+                <a:ea typeface="Calibri" pitchFamily="34" charset="-122"/>
+                <a:cs typeface="Calibri" pitchFamily="34" charset="-120"/>
+              </a:rPr>
+              <a:t>Tc source</a:t>
+            </a:r>
+            <a:endParaRPr lang="en-US" sz="950" dirty="0"/>
+          </a:p>
+        </p:txBody>
+      </p:sp>
+      <p:sp>
+        <p:nvSpPr>
+          <p:cNvPr id="18" name="Text 16"/>
+          <p:cNvSpPr txBox="1"/>
+          <p:nvPr/>
+        </p:nvSpPr>
+        <p:spPr>
+          <a:xfrm>
+            <a:off x="6784848" y="3712464"/>
+            <a:ext cx="1920240" cy="274320"/>
+          </a:xfrm>
+          <a:prstGeom prst="rect">
+            <a:avLst/>
+          </a:prstGeom>
+          <a:noFill/>
+          <a:ln/>
+        </p:spPr>
+        <p:txBody>
+          <a:bodyPr wrap="square" lIns="0" tIns="0" rIns="0" bIns="0" rtlCol="0" anchor="ctr"/>
+          <a:lstStyle/>
+          <a:p>
+            <a:pPr indent="0" marL="0">
+              <a:buNone/>
+            </a:pPr>
+            <a:r>
+              <a:rPr lang="en-US" sz="1050" dirty="0">
+                <a:solidFill>
+                  <a:srgbClr val="18222B"/>
+                </a:solidFill>
+                <a:latin typeface="Courier New" pitchFamily="34" charset="0"/>
+                <a:ea typeface="Courier New" pitchFamily="34" charset="-122"/>
+                <a:cs typeface="Courier New" pitchFamily="34" charset="-120"/>
+              </a:rPr>
+              <a:t>LiZrH6Ru</a:t>
+            </a:r>
+            <a:endParaRPr lang="en-US" sz="1050" dirty="0"/>
+          </a:p>
+        </p:txBody>
+      </p:sp>
+      <p:sp>
+        <p:nvSpPr>
+          <p:cNvPr id="19" name="Text 17"/>
+          <p:cNvSpPr txBox="1"/>
+          <p:nvPr/>
+        </p:nvSpPr>
+        <p:spPr>
+          <a:xfrm>
+            <a:off x="8759952" y="3712464"/>
+            <a:ext cx="731520" cy="274320"/>
+          </a:xfrm>
+          <a:prstGeom prst="rect">
+            <a:avLst/>
+          </a:prstGeom>
+          <a:noFill/>
+          <a:ln/>
+        </p:spPr>
+        <p:txBody>
+          <a:bodyPr wrap="square" lIns="0" tIns="0" rIns="0" bIns="0" rtlCol="0" anchor="ctr"/>
+          <a:lstStyle/>
+          <a:p>
+            <a:pPr algn="ctr" indent="0" marL="0">
+              <a:buNone/>
+            </a:pPr>
+            <a:r>
+              <a:rPr lang="en-US" sz="1050" dirty="0">
+                <a:solidFill>
+                  <a:srgbClr val="5B6B78"/>
+                </a:solidFill>
+                <a:latin typeface="Courier New" pitchFamily="34" charset="0"/>
+                <a:ea typeface="Courier New" pitchFamily="34" charset="-122"/>
+                <a:cs typeface="Courier New" pitchFamily="34" charset="-120"/>
+              </a:rPr>
+              <a:t>1</a:t>
+            </a:r>
+            <a:endParaRPr lang="en-US" sz="1050" dirty="0"/>
+          </a:p>
+        </p:txBody>
+      </p:sp>
+      <p:sp>
+        <p:nvSpPr>
+          <p:cNvPr id="20" name="Text 18"/>
+          <p:cNvSpPr txBox="1"/>
+          <p:nvPr/>
+        </p:nvSpPr>
+        <p:spPr>
+          <a:xfrm>
+            <a:off x="9528048" y="3712464"/>
+            <a:ext cx="731520" cy="274320"/>
+          </a:xfrm>
+          <a:prstGeom prst="rect">
+            <a:avLst/>
+          </a:prstGeom>
+          <a:noFill/>
+          <a:ln/>
+        </p:spPr>
+        <p:txBody>
+          <a:bodyPr wrap="square" lIns="0" tIns="0" rIns="0" bIns="0" rtlCol="0" anchor="ctr"/>
+          <a:lstStyle/>
+          <a:p>
+            <a:pPr algn="ctr" indent="0" marL="0">
+              <a:buNone/>
+            </a:pPr>
+            <a:r>
+              <a:rPr lang="en-US" sz="1050" dirty="0">
+                <a:solidFill>
+                  <a:srgbClr val="5B6B78"/>
+                </a:solidFill>
+                <a:latin typeface="Courier New" pitchFamily="34" charset="0"/>
+                <a:ea typeface="Courier New" pitchFamily="34" charset="-122"/>
+                <a:cs typeface="Courier New" pitchFamily="34" charset="-120"/>
+              </a:rPr>
+              <a:t>1</a:t>
+            </a:r>
+            <a:endParaRPr lang="en-US" sz="1050" dirty="0"/>
+          </a:p>
+        </p:txBody>
+      </p:sp>
+      <p:sp>
+        <p:nvSpPr>
+          <p:cNvPr id="21" name="Text 19"/>
+          <p:cNvSpPr txBox="1"/>
+          <p:nvPr/>
+        </p:nvSpPr>
+        <p:spPr>
+          <a:xfrm>
+            <a:off x="10332720" y="3712464"/>
+            <a:ext cx="1280160" cy="274320"/>
+          </a:xfrm>
+          <a:prstGeom prst="rect">
+            <a:avLst/>
+          </a:prstGeom>
+          <a:noFill/>
+          <a:ln/>
+        </p:spPr>
+        <p:txBody>
+          <a:bodyPr wrap="square" lIns="0" tIns="0" rIns="0" bIns="0" rtlCol="0" anchor="ctr"/>
+          <a:lstStyle/>
+          <a:p>
+            <a:pPr indent="0" marL="0">
+              <a:buNone/>
+            </a:pPr>
+            <a:r>
+              <a:rPr lang="en-US" sz="1000" b="1" dirty="0">
+                <a:solidFill>
+                  <a:srgbClr val="1F5F8B"/>
+                </a:solidFill>
+                <a:latin typeface="Calibri" pitchFamily="34" charset="0"/>
+                <a:ea typeface="Calibri" pitchFamily="34" charset="-122"/>
+                <a:cs typeface="Calibri" pitchFamily="34" charset="-120"/>
+              </a:rPr>
+              <a:t>measured</a:t>
+            </a:r>
+            <a:endParaRPr lang="en-US" sz="1000" dirty="0"/>
+          </a:p>
+        </p:txBody>
+      </p:sp>
+      <p:sp>
+        <p:nvSpPr>
+          <p:cNvPr id="22" name="Text 20"/>
+          <p:cNvSpPr txBox="1"/>
+          <p:nvPr/>
+        </p:nvSpPr>
+        <p:spPr>
+          <a:xfrm>
+            <a:off x="6784848" y="4014216"/>
+            <a:ext cx="1920240" cy="274320"/>
+          </a:xfrm>
+          <a:prstGeom prst="rect">
+            <a:avLst/>
+          </a:prstGeom>
+          <a:noFill/>
+          <a:ln/>
+        </p:spPr>
+        <p:txBody>
+          <a:bodyPr wrap="square" lIns="0" tIns="0" rIns="0" bIns="0" rtlCol="0" anchor="ctr"/>
+          <a:lstStyle/>
+          <a:p>
+            <a:pPr indent="0" marL="0">
+              <a:buNone/>
+            </a:pPr>
+            <a:r>
+              <a:rPr lang="en-US" sz="1050" dirty="0">
+                <a:solidFill>
+                  <a:srgbClr val="18222B"/>
+                </a:solidFill>
+                <a:latin typeface="Courier New" pitchFamily="34" charset="0"/>
+                <a:ea typeface="Courier New" pitchFamily="34" charset="-122"/>
+                <a:cs typeface="Courier New" pitchFamily="34" charset="-120"/>
+              </a:rPr>
+              <a:t>TaNb3H8</a:t>
+            </a:r>
+            <a:endParaRPr lang="en-US" sz="1050" dirty="0"/>
+          </a:p>
+        </p:txBody>
+      </p:sp>
+      <p:sp>
+        <p:nvSpPr>
+          <p:cNvPr id="23" name="Text 21"/>
+          <p:cNvSpPr txBox="1"/>
+          <p:nvPr/>
+        </p:nvSpPr>
+        <p:spPr>
+          <a:xfrm>
+            <a:off x="8759952" y="4014216"/>
+            <a:ext cx="731520" cy="274320"/>
+          </a:xfrm>
+          <a:prstGeom prst="rect">
+            <a:avLst/>
+          </a:prstGeom>
+          <a:noFill/>
+          <a:ln/>
+        </p:spPr>
+        <p:txBody>
+          <a:bodyPr wrap="square" lIns="0" tIns="0" rIns="0" bIns="0" rtlCol="0" anchor="ctr"/>
+          <a:lstStyle/>
+          <a:p>
+            <a:pPr algn="ctr" indent="0" marL="0">
+              <a:buNone/>
+            </a:pPr>
+            <a:r>
+              <a:rPr lang="en-US" sz="1050" dirty="0">
+                <a:solidFill>
+                  <a:srgbClr val="5B6B78"/>
+                </a:solidFill>
+                <a:latin typeface="Courier New" pitchFamily="34" charset="0"/>
+                <a:ea typeface="Courier New" pitchFamily="34" charset="-122"/>
+                <a:cs typeface="Courier New" pitchFamily="34" charset="-120"/>
+              </a:rPr>
+              <a:t>3</a:t>
+            </a:r>
+            <a:endParaRPr lang="en-US" sz="1050" dirty="0"/>
+          </a:p>
+        </p:txBody>
+      </p:sp>
+      <p:sp>
+        <p:nvSpPr>
+          <p:cNvPr id="24" name="Text 22"/>
+          <p:cNvSpPr txBox="1"/>
+          <p:nvPr/>
+        </p:nvSpPr>
+        <p:spPr>
+          <a:xfrm>
+            <a:off x="9528048" y="4014216"/>
+            <a:ext cx="731520" cy="274320"/>
+          </a:xfrm>
+          <a:prstGeom prst="rect">
+            <a:avLst/>
+          </a:prstGeom>
+          <a:noFill/>
+          <a:ln/>
+        </p:spPr>
+        <p:txBody>
+          <a:bodyPr wrap="square" lIns="0" tIns="0" rIns="0" bIns="0" rtlCol="0" anchor="ctr"/>
+          <a:lstStyle/>
+          <a:p>
+            <a:pPr algn="ctr" indent="0" marL="0">
+              <a:buNone/>
+            </a:pPr>
+            <a:r>
+              <a:rPr lang="en-US" sz="1050" b="1" dirty="0">
+                <a:solidFill>
+                  <a:srgbClr val="15803D"/>
+                </a:solidFill>
+                <a:latin typeface="Courier New" pitchFamily="34" charset="0"/>
+                <a:ea typeface="Courier New" pitchFamily="34" charset="-122"/>
+                <a:cs typeface="Courier New" pitchFamily="34" charset="-120"/>
+              </a:rPr>
+              <a:t>2 (+1)</a:t>
+            </a:r>
+            <a:endParaRPr lang="en-US" sz="1050" dirty="0"/>
+          </a:p>
+        </p:txBody>
+      </p:sp>
+      <p:sp>
+        <p:nvSpPr>
+          <p:cNvPr id="25" name="Text 23"/>
+          <p:cNvSpPr txBox="1"/>
+          <p:nvPr/>
+        </p:nvSpPr>
+        <p:spPr>
+          <a:xfrm>
+            <a:off x="10332720" y="4014216"/>
+            <a:ext cx="1280160" cy="274320"/>
+          </a:xfrm>
+          <a:prstGeom prst="rect">
+            <a:avLst/>
+          </a:prstGeom>
+          <a:noFill/>
+          <a:ln/>
+        </p:spPr>
+        <p:txBody>
+          <a:bodyPr wrap="square" lIns="0" tIns="0" rIns="0" bIns="0" rtlCol="0" anchor="ctr"/>
+          <a:lstStyle/>
+          <a:p>
+            <a:pPr indent="0" marL="0">
+              <a:buNone/>
+            </a:pPr>
+            <a:r>
+              <a:rPr lang="en-US" sz="1000" b="1" dirty="0">
+                <a:solidFill>
+                  <a:srgbClr val="1F5F8B"/>
+                </a:solidFill>
+                <a:latin typeface="Calibri" pitchFamily="34" charset="0"/>
+                <a:ea typeface="Calibri" pitchFamily="34" charset="-122"/>
+                <a:cs typeface="Calibri" pitchFamily="34" charset="-120"/>
+              </a:rPr>
+              <a:t>measured</a:t>
+            </a:r>
+            <a:endParaRPr lang="en-US" sz="1000" dirty="0"/>
+          </a:p>
+        </p:txBody>
+      </p:sp>
+      <p:sp>
+        <p:nvSpPr>
+          <p:cNvPr id="26" name="Text 24"/>
+          <p:cNvSpPr txBox="1"/>
+          <p:nvPr/>
+        </p:nvSpPr>
+        <p:spPr>
+          <a:xfrm>
+            <a:off x="6784848" y="4315968"/>
+            <a:ext cx="1920240" cy="274320"/>
+          </a:xfrm>
+          <a:prstGeom prst="rect">
+            <a:avLst/>
+          </a:prstGeom>
+          <a:noFill/>
+          <a:ln/>
+        </p:spPr>
+        <p:txBody>
+          <a:bodyPr wrap="square" lIns="0" tIns="0" rIns="0" bIns="0" rtlCol="0" anchor="ctr"/>
+          <a:lstStyle/>
+          <a:p>
+            <a:pPr indent="0" marL="0">
+              <a:buNone/>
+            </a:pPr>
+            <a:r>
+              <a:rPr lang="en-US" sz="1050" dirty="0">
+                <a:solidFill>
+                  <a:srgbClr val="18222B"/>
+                </a:solidFill>
+                <a:latin typeface="Courier New" pitchFamily="34" charset="0"/>
+                <a:ea typeface="Courier New" pitchFamily="34" charset="-122"/>
+                <a:cs typeface="Courier New" pitchFamily="34" charset="-120"/>
+              </a:rPr>
+              <a:t>EuCdH6Ru</a:t>
+            </a:r>
+            <a:endParaRPr lang="en-US" sz="1050" dirty="0"/>
+          </a:p>
+        </p:txBody>
+      </p:sp>
+      <p:sp>
+        <p:nvSpPr>
+          <p:cNvPr id="27" name="Text 25"/>
+          <p:cNvSpPr txBox="1"/>
+          <p:nvPr/>
+        </p:nvSpPr>
+        <p:spPr>
+          <a:xfrm>
+            <a:off x="8759952" y="4315968"/>
+            <a:ext cx="731520" cy="274320"/>
+          </a:xfrm>
+          <a:prstGeom prst="rect">
+            <a:avLst/>
+          </a:prstGeom>
+          <a:noFill/>
+          <a:ln/>
+        </p:spPr>
+        <p:txBody>
+          <a:bodyPr wrap="square" lIns="0" tIns="0" rIns="0" bIns="0" rtlCol="0" anchor="ctr"/>
+          <a:lstStyle/>
+          <a:p>
+            <a:pPr algn="ctr" indent="0" marL="0">
+              <a:buNone/>
+            </a:pPr>
+            <a:r>
+              <a:rPr lang="en-US" sz="1050" dirty="0">
+                <a:solidFill>
+                  <a:srgbClr val="5B6B78"/>
+                </a:solidFill>
+                <a:latin typeface="Courier New" pitchFamily="34" charset="0"/>
+                <a:ea typeface="Courier New" pitchFamily="34" charset="-122"/>
+                <a:cs typeface="Courier New" pitchFamily="34" charset="-120"/>
+              </a:rPr>
+              <a:t>6</a:t>
+            </a:r>
+            <a:endParaRPr lang="en-US" sz="1050" dirty="0"/>
+          </a:p>
+        </p:txBody>
+      </p:sp>
+      <p:sp>
+        <p:nvSpPr>
+          <p:cNvPr id="28" name="Text 26"/>
+          <p:cNvSpPr txBox="1"/>
+          <p:nvPr/>
+        </p:nvSpPr>
+        <p:spPr>
+          <a:xfrm>
+            <a:off x="9528048" y="4315968"/>
+            <a:ext cx="731520" cy="274320"/>
+          </a:xfrm>
+          <a:prstGeom prst="rect">
+            <a:avLst/>
+          </a:prstGeom>
+          <a:noFill/>
+          <a:ln/>
+        </p:spPr>
+        <p:txBody>
+          <a:bodyPr wrap="square" lIns="0" tIns="0" rIns="0" bIns="0" rtlCol="0" anchor="ctr"/>
+          <a:lstStyle/>
+          <a:p>
+            <a:pPr algn="ctr" indent="0" marL="0">
+              <a:buNone/>
+            </a:pPr>
+            <a:r>
+              <a:rPr lang="en-US" sz="1050" b="1" dirty="0">
+                <a:solidFill>
+                  <a:srgbClr val="15803D"/>
+                </a:solidFill>
+                <a:latin typeface="Courier New" pitchFamily="34" charset="0"/>
+                <a:ea typeface="Courier New" pitchFamily="34" charset="-122"/>
+                <a:cs typeface="Courier New" pitchFamily="34" charset="-120"/>
+              </a:rPr>
+              <a:t>3 (+3)</a:t>
+            </a:r>
+            <a:endParaRPr lang="en-US" sz="1050" dirty="0"/>
+          </a:p>
+        </p:txBody>
+      </p:sp>
+      <p:sp>
+        <p:nvSpPr>
+          <p:cNvPr id="29" name="Text 27"/>
+          <p:cNvSpPr txBox="1"/>
+          <p:nvPr/>
+        </p:nvSpPr>
+        <p:spPr>
+          <a:xfrm>
+            <a:off x="10332720" y="4315968"/>
+            <a:ext cx="1280160" cy="274320"/>
+          </a:xfrm>
+          <a:prstGeom prst="rect">
+            <a:avLst/>
+          </a:prstGeom>
+          <a:noFill/>
+          <a:ln/>
+        </p:spPr>
+        <p:txBody>
+          <a:bodyPr wrap="square" lIns="0" tIns="0" rIns="0" bIns="0" rtlCol="0" anchor="ctr"/>
+          <a:lstStyle/>
+          <a:p>
+            <a:pPr indent="0" marL="0">
+              <a:buNone/>
+            </a:pPr>
+            <a:r>
+              <a:rPr lang="en-US" sz="1000" dirty="0">
+                <a:solidFill>
+                  <a:srgbClr val="5B6B78"/>
+                </a:solidFill>
+                <a:latin typeface="Calibri" pitchFamily="34" charset="0"/>
+                <a:ea typeface="Calibri" pitchFamily="34" charset="-122"/>
+                <a:cs typeface="Calibri" pitchFamily="34" charset="-120"/>
+              </a:rPr>
+              <a:t>Allen–Dynes</a:t>
+            </a:r>
+            <a:endParaRPr lang="en-US" sz="1000" dirty="0"/>
+          </a:p>
+        </p:txBody>
+      </p:sp>
+      <p:sp>
+        <p:nvSpPr>
+          <p:cNvPr id="30" name="Text 28"/>
+          <p:cNvSpPr txBox="1"/>
+          <p:nvPr/>
+        </p:nvSpPr>
+        <p:spPr>
+          <a:xfrm>
+            <a:off x="6784848" y="4617720"/>
+            <a:ext cx="1920240" cy="274320"/>
+          </a:xfrm>
+          <a:prstGeom prst="rect">
+            <a:avLst/>
+          </a:prstGeom>
+          <a:noFill/>
+          <a:ln/>
+        </p:spPr>
+        <p:txBody>
+          <a:bodyPr wrap="square" lIns="0" tIns="0" rIns="0" bIns="0" rtlCol="0" anchor="ctr"/>
+          <a:lstStyle/>
+          <a:p>
+            <a:pPr indent="0" marL="0">
+              <a:buNone/>
+            </a:pPr>
+            <a:r>
+              <a:rPr lang="en-US" sz="1050" dirty="0">
+                <a:solidFill>
+                  <a:srgbClr val="18222B"/>
+                </a:solidFill>
+                <a:latin typeface="Courier New" pitchFamily="34" charset="0"/>
+                <a:ea typeface="Courier New" pitchFamily="34" charset="-122"/>
+                <a:cs typeface="Courier New" pitchFamily="34" charset="-120"/>
+              </a:rPr>
+              <a:t>Ta6MoH16</a:t>
+            </a:r>
+            <a:endParaRPr lang="en-US" sz="1050" dirty="0"/>
+          </a:p>
+        </p:txBody>
+      </p:sp>
+      <p:sp>
+        <p:nvSpPr>
+          <p:cNvPr id="31" name="Text 29"/>
+          <p:cNvSpPr txBox="1"/>
+          <p:nvPr/>
+        </p:nvSpPr>
+        <p:spPr>
+          <a:xfrm>
+            <a:off x="8759952" y="4617720"/>
+            <a:ext cx="731520" cy="274320"/>
+          </a:xfrm>
+          <a:prstGeom prst="rect">
+            <a:avLst/>
+          </a:prstGeom>
+          <a:noFill/>
+          <a:ln/>
+        </p:spPr>
+        <p:txBody>
+          <a:bodyPr wrap="square" lIns="0" tIns="0" rIns="0" bIns="0" rtlCol="0" anchor="ctr"/>
+          <a:lstStyle/>
+          <a:p>
+            <a:pPr algn="ctr" indent="0" marL="0">
+              <a:buNone/>
+            </a:pPr>
+            <a:r>
+              <a:rPr lang="en-US" sz="1050" dirty="0">
+                <a:solidFill>
+                  <a:srgbClr val="5B6B78"/>
+                </a:solidFill>
+                <a:latin typeface="Courier New" pitchFamily="34" charset="0"/>
+                <a:ea typeface="Courier New" pitchFamily="34" charset="-122"/>
+                <a:cs typeface="Courier New" pitchFamily="34" charset="-120"/>
+              </a:rPr>
+              <a:t>2</a:t>
+            </a:r>
+            <a:endParaRPr lang="en-US" sz="1050" dirty="0"/>
+          </a:p>
+        </p:txBody>
+      </p:sp>
+      <p:sp>
+        <p:nvSpPr>
+          <p:cNvPr id="32" name="Text 30"/>
+          <p:cNvSpPr txBox="1"/>
+          <p:nvPr/>
+        </p:nvSpPr>
+        <p:spPr>
+          <a:xfrm>
+            <a:off x="9528048" y="4617720"/>
+            <a:ext cx="731520" cy="274320"/>
+          </a:xfrm>
+          <a:prstGeom prst="rect">
+            <a:avLst/>
+          </a:prstGeom>
+          <a:noFill/>
+          <a:ln/>
+        </p:spPr>
+        <p:txBody>
+          <a:bodyPr wrap="square" lIns="0" tIns="0" rIns="0" bIns="0" rtlCol="0" anchor="ctr"/>
+          <a:lstStyle/>
+          <a:p>
+            <a:pPr algn="ctr" indent="0" marL="0">
+              <a:buNone/>
+            </a:pPr>
+            <a:r>
+              <a:rPr lang="en-US" sz="1050" b="1" dirty="0">
+                <a:solidFill>
+                  <a:srgbClr val="C2410C"/>
+                </a:solidFill>
+                <a:latin typeface="Courier New" pitchFamily="34" charset="0"/>
+                <a:ea typeface="Courier New" pitchFamily="34" charset="-122"/>
+                <a:cs typeface="Courier New" pitchFamily="34" charset="-120"/>
+              </a:rPr>
+              <a:t>4 (-2)</a:t>
+            </a:r>
+            <a:endParaRPr lang="en-US" sz="1050" dirty="0"/>
+          </a:p>
+        </p:txBody>
+      </p:sp>
+      <p:sp>
+        <p:nvSpPr>
+          <p:cNvPr id="33" name="Text 31"/>
+          <p:cNvSpPr txBox="1"/>
+          <p:nvPr/>
+        </p:nvSpPr>
+        <p:spPr>
+          <a:xfrm>
+            <a:off x="10332720" y="4617720"/>
+            <a:ext cx="1280160" cy="274320"/>
+          </a:xfrm>
+          <a:prstGeom prst="rect">
+            <a:avLst/>
+          </a:prstGeom>
+          <a:noFill/>
+          <a:ln/>
+        </p:spPr>
+        <p:txBody>
+          <a:bodyPr wrap="square" lIns="0" tIns="0" rIns="0" bIns="0" rtlCol="0" anchor="ctr"/>
+          <a:lstStyle/>
+          <a:p>
+            <a:pPr indent="0" marL="0">
+              <a:buNone/>
+            </a:pPr>
+            <a:r>
+              <a:rPr lang="en-US" sz="1000" dirty="0">
+                <a:solidFill>
+                  <a:srgbClr val="5B6B78"/>
+                </a:solidFill>
+                <a:latin typeface="Calibri" pitchFamily="34" charset="0"/>
+                <a:ea typeface="Calibri" pitchFamily="34" charset="-122"/>
+                <a:cs typeface="Calibri" pitchFamily="34" charset="-120"/>
+              </a:rPr>
+              <a:t>Allen–Dynes</a:t>
+            </a:r>
+            <a:endParaRPr lang="en-US" sz="1000" dirty="0"/>
+          </a:p>
+        </p:txBody>
+      </p:sp>
+      <p:sp>
+        <p:nvSpPr>
+          <p:cNvPr id="34" name="Text 32"/>
+          <p:cNvSpPr txBox="1"/>
+          <p:nvPr/>
+        </p:nvSpPr>
+        <p:spPr>
+          <a:xfrm>
+            <a:off x="6784848" y="4919472"/>
+            <a:ext cx="1920240" cy="274320"/>
+          </a:xfrm>
+          <a:prstGeom prst="rect">
+            <a:avLst/>
+          </a:prstGeom>
+          <a:noFill/>
+          <a:ln/>
+        </p:spPr>
+        <p:txBody>
+          <a:bodyPr wrap="square" lIns="0" tIns="0" rIns="0" bIns="0" rtlCol="0" anchor="ctr"/>
+          <a:lstStyle/>
+          <a:p>
+            <a:pPr indent="0" marL="0">
+              <a:buNone/>
+            </a:pPr>
+            <a:r>
+              <a:rPr lang="en-US" sz="1050" dirty="0">
+                <a:solidFill>
+                  <a:srgbClr val="18222B"/>
+                </a:solidFill>
+                <a:latin typeface="Courier New" pitchFamily="34" charset="0"/>
+                <a:ea typeface="Courier New" pitchFamily="34" charset="-122"/>
+                <a:cs typeface="Courier New" pitchFamily="34" charset="-120"/>
+              </a:rPr>
+              <a:t>Ta3NbH8</a:t>
+            </a:r>
+            <a:endParaRPr lang="en-US" sz="1050" dirty="0"/>
+          </a:p>
+        </p:txBody>
+      </p:sp>
+      <p:sp>
+        <p:nvSpPr>
+          <p:cNvPr id="35" name="Text 33"/>
+          <p:cNvSpPr txBox="1"/>
+          <p:nvPr/>
+        </p:nvSpPr>
+        <p:spPr>
+          <a:xfrm>
+            <a:off x="8759952" y="4919472"/>
+            <a:ext cx="731520" cy="274320"/>
+          </a:xfrm>
+          <a:prstGeom prst="rect">
+            <a:avLst/>
+          </a:prstGeom>
+          <a:noFill/>
+          <a:ln/>
+        </p:spPr>
+        <p:txBody>
+          <a:bodyPr wrap="square" lIns="0" tIns="0" rIns="0" bIns="0" rtlCol="0" anchor="ctr"/>
+          <a:lstStyle/>
+          <a:p>
+            <a:pPr algn="ctr" indent="0" marL="0">
+              <a:buNone/>
+            </a:pPr>
+            <a:r>
+              <a:rPr lang="en-US" sz="1050" dirty="0">
+                <a:solidFill>
+                  <a:srgbClr val="5B6B78"/>
+                </a:solidFill>
+                <a:latin typeface="Courier New" pitchFamily="34" charset="0"/>
+                <a:ea typeface="Courier New" pitchFamily="34" charset="-122"/>
+                <a:cs typeface="Courier New" pitchFamily="34" charset="-120"/>
+              </a:rPr>
+              <a:t>4</a:t>
+            </a:r>
+            <a:endParaRPr lang="en-US" sz="1050" dirty="0"/>
+          </a:p>
+        </p:txBody>
+      </p:sp>
+      <p:sp>
+        <p:nvSpPr>
+          <p:cNvPr id="36" name="Text 34"/>
+          <p:cNvSpPr txBox="1"/>
+          <p:nvPr/>
+        </p:nvSpPr>
+        <p:spPr>
+          <a:xfrm>
+            <a:off x="9528048" y="4919472"/>
+            <a:ext cx="731520" cy="274320"/>
+          </a:xfrm>
+          <a:prstGeom prst="rect">
+            <a:avLst/>
+          </a:prstGeom>
+          <a:noFill/>
+          <a:ln/>
+        </p:spPr>
+        <p:txBody>
+          <a:bodyPr wrap="square" lIns="0" tIns="0" rIns="0" bIns="0" rtlCol="0" anchor="ctr"/>
+          <a:lstStyle/>
+          <a:p>
+            <a:pPr algn="ctr" indent="0" marL="0">
+              <a:buNone/>
+            </a:pPr>
+            <a:r>
+              <a:rPr lang="en-US" sz="1050" b="1" dirty="0">
+                <a:solidFill>
+                  <a:srgbClr val="C2410C"/>
+                </a:solidFill>
+                <a:latin typeface="Courier New" pitchFamily="34" charset="0"/>
+                <a:ea typeface="Courier New" pitchFamily="34" charset="-122"/>
+                <a:cs typeface="Courier New" pitchFamily="34" charset="-120"/>
+              </a:rPr>
+              <a:t>5 (-1)</a:t>
+            </a:r>
+            <a:endParaRPr lang="en-US" sz="1050" dirty="0"/>
+          </a:p>
+        </p:txBody>
+      </p:sp>
+      <p:sp>
+        <p:nvSpPr>
+          <p:cNvPr id="37" name="Text 35"/>
+          <p:cNvSpPr txBox="1"/>
+          <p:nvPr/>
+        </p:nvSpPr>
+        <p:spPr>
+          <a:xfrm>
+            <a:off x="10332720" y="4919472"/>
+            <a:ext cx="1280160" cy="274320"/>
+          </a:xfrm>
+          <a:prstGeom prst="rect">
+            <a:avLst/>
+          </a:prstGeom>
+          <a:noFill/>
+          <a:ln/>
+        </p:spPr>
+        <p:txBody>
+          <a:bodyPr wrap="square" lIns="0" tIns="0" rIns="0" bIns="0" rtlCol="0" anchor="ctr"/>
+          <a:lstStyle/>
+          <a:p>
+            <a:pPr indent="0" marL="0">
+              <a:buNone/>
+            </a:pPr>
+            <a:r>
+              <a:rPr lang="en-US" sz="1000" dirty="0">
+                <a:solidFill>
+                  <a:srgbClr val="5B6B78"/>
+                </a:solidFill>
+                <a:latin typeface="Calibri" pitchFamily="34" charset="0"/>
+                <a:ea typeface="Calibri" pitchFamily="34" charset="-122"/>
+                <a:cs typeface="Calibri" pitchFamily="34" charset="-120"/>
+              </a:rPr>
+              <a:t>Allen–Dynes</a:t>
+            </a:r>
+            <a:endParaRPr lang="en-US" sz="1000" dirty="0"/>
+          </a:p>
+        </p:txBody>
+      </p:sp>
+      <p:sp>
+        <p:nvSpPr>
+          <p:cNvPr id="38" name="Text 36"/>
+          <p:cNvSpPr txBox="1"/>
+          <p:nvPr/>
+        </p:nvSpPr>
+        <p:spPr>
+          <a:xfrm>
+            <a:off x="6784848" y="5221224"/>
+            <a:ext cx="1920240" cy="274320"/>
+          </a:xfrm>
+          <a:prstGeom prst="rect">
+            <a:avLst/>
+          </a:prstGeom>
+          <a:noFill/>
+          <a:ln/>
+        </p:spPr>
+        <p:txBody>
+          <a:bodyPr wrap="square" lIns="0" tIns="0" rIns="0" bIns="0" rtlCol="0" anchor="ctr"/>
+          <a:lstStyle/>
+          <a:p>
+            <a:pPr indent="0" marL="0">
+              <a:buNone/>
+            </a:pPr>
+            <a:r>
+              <a:rPr lang="en-US" sz="1050" dirty="0">
+                <a:solidFill>
+                  <a:srgbClr val="18222B"/>
+                </a:solidFill>
+                <a:latin typeface="Courier New" pitchFamily="34" charset="0"/>
+                <a:ea typeface="Courier New" pitchFamily="34" charset="-122"/>
+                <a:cs typeface="Courier New" pitchFamily="34" charset="-120"/>
+              </a:rPr>
+              <a:t>Ta6NbH16</a:t>
+            </a:r>
+            <a:endParaRPr lang="en-US" sz="1050" dirty="0"/>
+          </a:p>
+        </p:txBody>
+      </p:sp>
+      <p:sp>
+        <p:nvSpPr>
+          <p:cNvPr id="39" name="Text 37"/>
+          <p:cNvSpPr txBox="1"/>
+          <p:nvPr/>
+        </p:nvSpPr>
+        <p:spPr>
+          <a:xfrm>
+            <a:off x="8759952" y="5221224"/>
+            <a:ext cx="731520" cy="274320"/>
+          </a:xfrm>
+          <a:prstGeom prst="rect">
+            <a:avLst/>
+          </a:prstGeom>
+          <a:noFill/>
+          <a:ln/>
+        </p:spPr>
+        <p:txBody>
+          <a:bodyPr wrap="square" lIns="0" tIns="0" rIns="0" bIns="0" rtlCol="0" anchor="ctr"/>
+          <a:lstStyle/>
+          <a:p>
+            <a:pPr algn="ctr" indent="0" marL="0">
+              <a:buNone/>
+            </a:pPr>
+            <a:r>
+              <a:rPr lang="en-US" sz="1050" dirty="0">
+                <a:solidFill>
+                  <a:srgbClr val="5B6B78"/>
+                </a:solidFill>
+                <a:latin typeface="Courier New" pitchFamily="34" charset="0"/>
+                <a:ea typeface="Courier New" pitchFamily="34" charset="-122"/>
+                <a:cs typeface="Courier New" pitchFamily="34" charset="-120"/>
+              </a:rPr>
+              <a:t>5</a:t>
+            </a:r>
+            <a:endParaRPr lang="en-US" sz="1050" dirty="0"/>
+          </a:p>
+        </p:txBody>
+      </p:sp>
+      <p:sp>
+        <p:nvSpPr>
+          <p:cNvPr id="40" name="Text 38"/>
+          <p:cNvSpPr txBox="1"/>
+          <p:nvPr/>
+        </p:nvSpPr>
+        <p:spPr>
+          <a:xfrm>
+            <a:off x="9528048" y="5221224"/>
+            <a:ext cx="731520" cy="274320"/>
+          </a:xfrm>
+          <a:prstGeom prst="rect">
+            <a:avLst/>
+          </a:prstGeom>
+          <a:noFill/>
+          <a:ln/>
+        </p:spPr>
+        <p:txBody>
+          <a:bodyPr wrap="square" lIns="0" tIns="0" rIns="0" bIns="0" rtlCol="0" anchor="ctr"/>
+          <a:lstStyle/>
+          <a:p>
+            <a:pPr algn="ctr" indent="0" marL="0">
+              <a:buNone/>
+            </a:pPr>
+            <a:r>
+              <a:rPr lang="en-US" sz="1050" b="1" dirty="0">
+                <a:solidFill>
+                  <a:srgbClr val="C2410C"/>
+                </a:solidFill>
+                <a:latin typeface="Courier New" pitchFamily="34" charset="0"/>
+                <a:ea typeface="Courier New" pitchFamily="34" charset="-122"/>
+                <a:cs typeface="Courier New" pitchFamily="34" charset="-120"/>
+              </a:rPr>
+              <a:t>6 (-1)</a:t>
+            </a:r>
+            <a:endParaRPr lang="en-US" sz="1050" dirty="0"/>
+          </a:p>
+        </p:txBody>
+      </p:sp>
+      <p:sp>
+        <p:nvSpPr>
+          <p:cNvPr id="41" name="Text 39"/>
+          <p:cNvSpPr txBox="1"/>
+          <p:nvPr/>
+        </p:nvSpPr>
+        <p:spPr>
+          <a:xfrm>
+            <a:off x="10332720" y="5221224"/>
+            <a:ext cx="1280160" cy="274320"/>
+          </a:xfrm>
+          <a:prstGeom prst="rect">
+            <a:avLst/>
+          </a:prstGeom>
+          <a:noFill/>
+          <a:ln/>
+        </p:spPr>
+        <p:txBody>
+          <a:bodyPr wrap="square" lIns="0" tIns="0" rIns="0" bIns="0" rtlCol="0" anchor="ctr"/>
+          <a:lstStyle/>
+          <a:p>
+            <a:pPr indent="0" marL="0">
+              <a:buNone/>
+            </a:pPr>
+            <a:r>
+              <a:rPr lang="en-US" sz="1000" dirty="0">
+                <a:solidFill>
+                  <a:srgbClr val="5B6B78"/>
+                </a:solidFill>
+                <a:latin typeface="Calibri" pitchFamily="34" charset="0"/>
+                <a:ea typeface="Calibri" pitchFamily="34" charset="-122"/>
+                <a:cs typeface="Calibri" pitchFamily="34" charset="-120"/>
+              </a:rPr>
+              <a:t>Allen–Dynes</a:t>
+            </a:r>
+            <a:endParaRPr lang="en-US" sz="1000" dirty="0"/>
+          </a:p>
+        </p:txBody>
+      </p:sp>
+      <p:sp>
+        <p:nvSpPr>
+          <p:cNvPr id="42" name="Text 40"/>
+          <p:cNvSpPr txBox="1"/>
+          <p:nvPr/>
+        </p:nvSpPr>
+        <p:spPr>
+          <a:xfrm>
+            <a:off x="6784848" y="5522976"/>
+            <a:ext cx="4572000" cy="274320"/>
           </a:xfrm>
           <a:prstGeom prst="rect">
             <a:avLst/>
@@ -6396,22 +7594,108 @@
           <a:bodyPr wrap="square" lIns="0" tIns="0" rIns="0" bIns="0" rtlCol="0" anchor="t"/>
           <a:lstStyle/>
           <a:p>
-            <a:pPr algn="l" indent="0" marL="0">
+            <a:pPr indent="0" marL="0">
+              <a:lnSpc>
+                <a:spcPts val="1300"/>
+              </a:lnSpc>
+              <a:buNone/>
+            </a:pPr>
+            <a:r>
+              <a:rPr lang="en-US" sz="1000" i="1" dirty="0">
+                <a:solidFill>
+                  <a:srgbClr val="5B6B78"/>
+                </a:solidFill>
+                <a:latin typeface="Calibri" pitchFamily="34" charset="0"/>
+                <a:ea typeface="Calibri" pitchFamily="34" charset="-122"/>
+                <a:cs typeface="Calibri" pitchFamily="34" charset="-120"/>
+              </a:rPr>
+              <a:t>A measured Tc supersedes every calculation, and the hypothesis moves from proposed to supported or contradicted.</a:t>
+            </a:r>
+            <a:endParaRPr lang="en-US" sz="1000" dirty="0"/>
+          </a:p>
+        </p:txBody>
+      </p:sp>
+      <p:sp>
+        <p:nvSpPr>
+          <p:cNvPr id="43" name="Shape 41"/>
+          <p:cNvSpPr/>
+          <p:nvPr/>
+        </p:nvSpPr>
+        <p:spPr>
+          <a:xfrm>
+            <a:off x="566928" y="5998464"/>
+            <a:ext cx="11055096" cy="694944"/>
+          </a:xfrm>
+          <a:prstGeom prst="roundRect">
+            <a:avLst>
+              <a:gd name="adj" fmla="val 10526"/>
+            </a:avLst>
+          </a:prstGeom>
+          <a:solidFill>
+            <a:srgbClr val="18222B"/>
+          </a:solidFill>
+          <a:ln w="9525">
+            <a:solidFill>
+              <a:srgbClr val="18222B"/>
+            </a:solidFill>
+            <a:prstDash val="solid"/>
+          </a:ln>
+        </p:spPr>
+      </p:sp>
+      <p:sp>
+        <p:nvSpPr>
+          <p:cNvPr id="44" name="Text 42"/>
+          <p:cNvSpPr txBox="1"/>
+          <p:nvPr/>
+        </p:nvSpPr>
+        <p:spPr>
+          <a:xfrm>
+            <a:off x="932688" y="5998464"/>
+            <a:ext cx="10323576" cy="694944"/>
+          </a:xfrm>
+          <a:prstGeom prst="rect">
+            <a:avLst/>
+          </a:prstGeom>
+          <a:noFill/>
+          <a:ln/>
+        </p:spPr>
+        <p:txBody>
+          <a:bodyPr wrap="square" lIns="0" tIns="0" rIns="0" bIns="0" rtlCol="0" anchor="ctr"/>
+          <a:lstStyle/>
+          <a:p>
+            <a:pPr indent="0" marL="0">
               <a:lnSpc>
                 <a:spcPts val="1400"/>
               </a:lnSpc>
               <a:buNone/>
             </a:pPr>
             <a:r>
+              <a:rPr lang="en-US" sz="1050" b="1" dirty="0">
+                <a:solidFill>
+                  <a:srgbClr val="FFFFFF"/>
+                </a:solidFill>
+                <a:latin typeface="Calibri" pitchFamily="34" charset="0"/>
+                <a:ea typeface="Calibri" pitchFamily="34" charset="-122"/>
+                <a:cs typeface="Calibri" pitchFamily="34" charset="-120"/>
+              </a:rPr>
+              <a:t>Measuring the leader low moved candidates nobody tested. </a:t>
+            </a:r>
+            <a:pPr indent="0" marL="0">
+              <a:lnSpc>
+                <a:spcPts val="1400"/>
+              </a:lnSpc>
+              <a:buNone/>
+            </a:pPr>
+            <a:r>
               <a:rPr lang="en-US" sz="1050" dirty="0">
                 <a:solidFill>
-                  <a:srgbClr val="5B6B78"/>
-                </a:solidFill>
-                <a:latin typeface="Calibri" pitchFamily="34" charset="0"/>
-                <a:ea typeface="Calibri" pitchFamily="34" charset="-122"/>
-                <a:cs typeface="Calibri" pitchFamily="34" charset="-120"/>
-              </a:rPr>
-              <a:t>A high-fidelity prototype is a product manager's deliverable. Building it in React would have demonstrated wanting to be a front-end engineer instead.</a:t>
+                  <a:srgbClr val="C3D0DA"/>
+                </a:solidFill>
+                <a:latin typeface="Calibri" pitchFamily="34" charset="0"/>
+                <a:ea typeface="Calibri" pitchFamily="34" charset="-122"/>
+                <a:cs typeface="Calibri" pitchFamily="34" charset="-120"/>
+              </a:rPr>
+              <a:t>Tc is normalized against the best in the cohort, so when the leader falls every untested compound becomes relatively more attractive — partly offset by the confidence penalty the same evidence applied to the method. A ranking is a statement about a set, not about a compound.</a:t>
             </a:r>
             <a:endParaRPr lang="en-US" sz="1050" dirty="0"/>
           </a:p>
@@ -6428,6 +7712,532 @@
 <file path=ppt/slides/slide13.xml><?xml version="1.0" encoding="utf-8"?>
 <p:sld xmlns:a="http://schemas.openxmlformats.org/drawingml/2006/main" xmlns:r="http://schemas.openxmlformats.org/officeDocument/2006/relationships" xmlns:p="http://schemas.openxmlformats.org/presentationml/2006/main">
   <p:cSld name="Slide 13">
+    <p:bg>
+      <p:bgPr>
+        <a:solidFill>
+          <a:srgbClr val="F1F4F7"/>
+        </a:solidFill>
+      </p:bgPr>
+    </p:bg>
+    <p:spTree>
+      <p:nvGrpSpPr>
+        <p:cNvPr id="1" name=""/>
+        <p:cNvGrpSpPr/>
+        <p:nvPr/>
+      </p:nvGrpSpPr>
+      <p:grpSpPr>
+        <a:xfrm>
+          <a:off x="0" y="0"/>
+          <a:ext cx="0" cy="0"/>
+          <a:chOff x="0" y="0"/>
+          <a:chExt cx="0" cy="0"/>
+        </a:xfrm>
+      </p:grpSpPr>
+      <p:sp>
+        <p:nvSpPr>
+          <p:cNvPr id="2" name="Shape 0"/>
+          <p:cNvSpPr/>
+          <p:nvPr/>
+        </p:nvSpPr>
+        <p:spPr>
+          <a:xfrm>
+            <a:off x="566928" y="384048"/>
+            <a:ext cx="4087368" cy="292608"/>
+          </a:xfrm>
+          <a:prstGeom prst="roundRect">
+            <a:avLst>
+              <a:gd name="adj" fmla="val 50000"/>
+            </a:avLst>
+          </a:prstGeom>
+          <a:solidFill>
+            <a:srgbClr val="1F5F8B"/>
+          </a:solidFill>
+          <a:ln w="12700">
+            <a:solidFill>
+              <a:srgbClr val="1F5F8B"/>
+            </a:solidFill>
+            <a:prstDash val="solid"/>
+          </a:ln>
+        </p:spPr>
+      </p:sp>
+      <p:sp>
+        <p:nvSpPr>
+          <p:cNvPr id="3" name="Text 1"/>
+          <p:cNvSpPr txBox="1"/>
+          <p:nvPr/>
+        </p:nvSpPr>
+        <p:spPr>
+          <a:xfrm>
+            <a:off x="566928" y="384048"/>
+            <a:ext cx="4087368" cy="292608"/>
+          </a:xfrm>
+          <a:prstGeom prst="rect">
+            <a:avLst/>
+          </a:prstGeom>
+          <a:noFill/>
+          <a:ln/>
+        </p:spPr>
+        <p:txBody>
+          <a:bodyPr wrap="square" lIns="0" tIns="0" rIns="0" bIns="0" rtlCol="0" anchor="ctr"/>
+          <a:lstStyle/>
+          <a:p>
+            <a:pPr algn="ctr" indent="0" marL="0">
+              <a:buNone/>
+            </a:pPr>
+            <a:r>
+              <a:rPr lang="en-US" sz="1050" b="1" spc="120" kern="0" dirty="0">
+                <a:solidFill>
+                  <a:srgbClr val="FFFFFF"/>
+                </a:solidFill>
+                <a:latin typeface="Calibri" pitchFamily="34" charset="0"/>
+                <a:ea typeface="Calibri" pitchFamily="34" charset="-122"/>
+                <a:cs typeface="Calibri" pitchFamily="34" charset="-120"/>
+              </a:rPr>
+              <a:t>12  ·  THE OPERATOR SURFACE</a:t>
+            </a:r>
+            <a:endParaRPr lang="en-US" sz="1050" dirty="0"/>
+          </a:p>
+        </p:txBody>
+      </p:sp>
+      <p:sp>
+        <p:nvSpPr>
+          <p:cNvPr id="4" name="Text 2"/>
+          <p:cNvSpPr txBox="1"/>
+          <p:nvPr/>
+        </p:nvSpPr>
+        <p:spPr>
+          <a:xfrm>
+            <a:off x="566928" y="868680"/>
+            <a:ext cx="11055096" cy="749808"/>
+          </a:xfrm>
+          <a:prstGeom prst="rect">
+            <a:avLst/>
+          </a:prstGeom>
+          <a:noFill/>
+          <a:ln/>
+        </p:spPr>
+        <p:txBody>
+          <a:bodyPr wrap="square" lIns="0" tIns="0" rIns="0" bIns="0" rtlCol="0" anchor="ctr"/>
+          <a:lstStyle/>
+          <a:p>
+            <a:pPr indent="0" marL="0">
+              <a:buNone/>
+            </a:pPr>
+            <a:r>
+              <a:rPr lang="en-US" sz="3400" b="1" dirty="0">
+                <a:solidFill>
+                  <a:srgbClr val="18222B"/>
+                </a:solidFill>
+                <a:latin typeface="Cambria" pitchFamily="34" charset="0"/>
+                <a:ea typeface="Cambria" pitchFamily="34" charset="-122"/>
+                <a:cs typeface="Cambria" pitchFamily="34" charset="-120"/>
+              </a:rPr>
+              <a:t>Where a person actually meets the loop</a:t>
+            </a:r>
+            <a:endParaRPr lang="en-US" sz="3400" dirty="0"/>
+          </a:p>
+        </p:txBody>
+      </p:sp>
+      <p:pic>
+        <p:nvPicPr>
+          <p:cNvPr id="5" name="Image 0" descr="/Users/xtc/Downloads/ai-to-lab-orchestrator/docs/mockups/bench_review_shot.png">    </p:cNvPr>
+          <p:cNvPicPr>
+            <a:picLocks noChangeAspect="1"/>
+          </p:cNvPicPr>
+          <p:nvPr/>
+        </p:nvPicPr>
+        <p:blipFill>
+          <a:blip r:embed="rId1"/>
+          <a:srcRect l="0" r="0" t="0" b="0"/>
+          <a:stretch/>
+        </p:blipFill>
+        <p:spPr>
+          <a:xfrm>
+            <a:off x="566928" y="1783080"/>
+            <a:ext cx="6766560" cy="4434840"/>
+          </a:xfrm>
+          <a:prstGeom prst="rect">
+            <a:avLst/>
+          </a:prstGeom>
+        </p:spPr>
+      </p:pic>
+      <p:sp>
+        <p:nvSpPr>
+          <p:cNvPr id="6" name="Shape 3"/>
+          <p:cNvSpPr/>
+          <p:nvPr/>
+        </p:nvSpPr>
+        <p:spPr>
+          <a:xfrm>
+            <a:off x="7589520" y="1865376"/>
+            <a:ext cx="237744" cy="237744"/>
+          </a:xfrm>
+          <a:prstGeom prst="roundRect">
+            <a:avLst>
+              <a:gd name="adj" fmla="val 50000"/>
+            </a:avLst>
+          </a:prstGeom>
+          <a:solidFill>
+            <a:srgbClr val="C2410C"/>
+          </a:solidFill>
+          <a:ln w="12700">
+            <a:solidFill>
+              <a:srgbClr val="C2410C"/>
+            </a:solidFill>
+            <a:prstDash val="solid"/>
+          </a:ln>
+        </p:spPr>
+      </p:sp>
+      <p:sp>
+        <p:nvSpPr>
+          <p:cNvPr id="7" name="Text 4"/>
+          <p:cNvSpPr txBox="1"/>
+          <p:nvPr/>
+        </p:nvSpPr>
+        <p:spPr>
+          <a:xfrm>
+            <a:off x="7973568" y="1828800"/>
+            <a:ext cx="3657600" cy="310896"/>
+          </a:xfrm>
+          <a:prstGeom prst="rect">
+            <a:avLst/>
+          </a:prstGeom>
+          <a:noFill/>
+          <a:ln/>
+        </p:spPr>
+        <p:txBody>
+          <a:bodyPr wrap="square" lIns="0" tIns="0" rIns="0" bIns="0" rtlCol="0" anchor="ctr"/>
+          <a:lstStyle/>
+          <a:p>
+            <a:pPr indent="0" marL="0">
+              <a:buNone/>
+            </a:pPr>
+            <a:r>
+              <a:rPr lang="en-US" sz="1400" b="1" dirty="0">
+                <a:solidFill>
+                  <a:srgbClr val="18222B"/>
+                </a:solidFill>
+                <a:latin typeface="Cambria" pitchFamily="34" charset="0"/>
+                <a:ea typeface="Cambria" pitchFamily="34" charset="-122"/>
+                <a:cs typeface="Cambria" pitchFamily="34" charset="-120"/>
+              </a:rPr>
+              <a:t>The approval queue is the hero</a:t>
+            </a:r>
+            <a:endParaRPr lang="en-US" sz="1400" dirty="0"/>
+          </a:p>
+        </p:txBody>
+      </p:sp>
+      <p:sp>
+        <p:nvSpPr>
+          <p:cNvPr id="8" name="Text 5"/>
+          <p:cNvSpPr txBox="1"/>
+          <p:nvPr/>
+        </p:nvSpPr>
+        <p:spPr>
+          <a:xfrm>
+            <a:off x="7973568" y="2176272"/>
+            <a:ext cx="3657600" cy="1005840"/>
+          </a:xfrm>
+          <a:prstGeom prst="rect">
+            <a:avLst/>
+          </a:prstGeom>
+          <a:noFill/>
+          <a:ln/>
+        </p:spPr>
+        <p:txBody>
+          <a:bodyPr wrap="square" lIns="0" tIns="0" rIns="0" bIns="0" rtlCol="0" anchor="t"/>
+          <a:lstStyle/>
+          <a:p>
+            <a:pPr indent="0" marL="0">
+              <a:lnSpc>
+                <a:spcPts val="1500"/>
+              </a:lnSpc>
+              <a:buNone/>
+            </a:pPr>
+            <a:r>
+              <a:rPr lang="en-US" sz="1100" dirty="0">
+                <a:solidFill>
+                  <a:srgbClr val="5B6B78"/>
+                </a:solidFill>
+                <a:latin typeface="Calibri" pitchFamily="34" charset="0"/>
+                <a:ea typeface="Calibri" pitchFamily="34" charset="-122"/>
+                <a:cs typeface="Calibri" pitchFamily="34" charset="-120"/>
+              </a:rPr>
+              <a:t>The held experiment is the only thing on the loop that needs a human. Everything else — proposing, executing, logging — does not. Putting approval anywhere but first would mean missing why this screen exists.</a:t>
+            </a:r>
+            <a:endParaRPr lang="en-US" sz="1100" dirty="0"/>
+          </a:p>
+        </p:txBody>
+      </p:sp>
+      <p:sp>
+        <p:nvSpPr>
+          <p:cNvPr id="9" name="Shape 6"/>
+          <p:cNvSpPr/>
+          <p:nvPr/>
+        </p:nvSpPr>
+        <p:spPr>
+          <a:xfrm>
+            <a:off x="7589520" y="3346704"/>
+            <a:ext cx="237744" cy="237744"/>
+          </a:xfrm>
+          <a:prstGeom prst="roundRect">
+            <a:avLst>
+              <a:gd name="adj" fmla="val 50000"/>
+            </a:avLst>
+          </a:prstGeom>
+          <a:solidFill>
+            <a:srgbClr val="C2410C"/>
+          </a:solidFill>
+          <a:ln w="12700">
+            <a:solidFill>
+              <a:srgbClr val="C2410C"/>
+            </a:solidFill>
+            <a:prstDash val="solid"/>
+          </a:ln>
+        </p:spPr>
+      </p:sp>
+      <p:sp>
+        <p:nvSpPr>
+          <p:cNvPr id="10" name="Text 7"/>
+          <p:cNvSpPr txBox="1"/>
+          <p:nvPr/>
+        </p:nvSpPr>
+        <p:spPr>
+          <a:xfrm>
+            <a:off x="7973568" y="3310128"/>
+            <a:ext cx="3657600" cy="310896"/>
+          </a:xfrm>
+          <a:prstGeom prst="rect">
+            <a:avLst/>
+          </a:prstGeom>
+          <a:noFill/>
+          <a:ln/>
+        </p:spPr>
+        <p:txBody>
+          <a:bodyPr wrap="square" lIns="0" tIns="0" rIns="0" bIns="0" rtlCol="0" anchor="ctr"/>
+          <a:lstStyle/>
+          <a:p>
+            <a:pPr indent="0" marL="0">
+              <a:buNone/>
+            </a:pPr>
+            <a:r>
+              <a:rPr lang="en-US" sz="1400" b="1" dirty="0">
+                <a:solidFill>
+                  <a:srgbClr val="18222B"/>
+                </a:solidFill>
+                <a:latin typeface="Cambria" pitchFamily="34" charset="0"/>
+                <a:ea typeface="Cambria" pitchFamily="34" charset="-122"/>
+                <a:cs typeface="Cambria" pitchFamily="34" charset="-120"/>
+              </a:rPr>
+              <a:t>Every value is real output</a:t>
+            </a:r>
+            <a:endParaRPr lang="en-US" sz="1400" dirty="0"/>
+          </a:p>
+        </p:txBody>
+      </p:sp>
+      <p:sp>
+        <p:nvSpPr>
+          <p:cNvPr id="11" name="Text 8"/>
+          <p:cNvSpPr txBox="1"/>
+          <p:nvPr/>
+        </p:nvSpPr>
+        <p:spPr>
+          <a:xfrm>
+            <a:off x="7973568" y="3657600"/>
+            <a:ext cx="3657600" cy="1005840"/>
+          </a:xfrm>
+          <a:prstGeom prst="rect">
+            <a:avLst/>
+          </a:prstGeom>
+          <a:noFill/>
+          <a:ln/>
+        </p:spPr>
+        <p:txBody>
+          <a:bodyPr wrap="square" lIns="0" tIns="0" rIns="0" bIns="0" rtlCol="0" anchor="t"/>
+          <a:lstStyle/>
+          <a:p>
+            <a:pPr indent="0" marL="0">
+              <a:lnSpc>
+                <a:spcPts val="1500"/>
+              </a:lnSpc>
+              <a:buNone/>
+            </a:pPr>
+            <a:r>
+              <a:rPr lang="en-US" sz="1100" dirty="0">
+                <a:solidFill>
+                  <a:srgbClr val="5B6B78"/>
+                </a:solidFill>
+                <a:latin typeface="Calibri" pitchFamily="34" charset="0"/>
+                <a:ea typeface="Calibri" pitchFamily="34" charset="-122"/>
+                <a:cs typeface="Calibri" pitchFamily="34" charset="-120"/>
+              </a:rPr>
+              <a:t>The held parameters, the triggered rule, the measurements, the objective breakdown and both artefacts are genuine system output, not illustration.</a:t>
+            </a:r>
+            <a:endParaRPr lang="en-US" sz="1100" dirty="0"/>
+          </a:p>
+        </p:txBody>
+      </p:sp>
+      <p:sp>
+        <p:nvSpPr>
+          <p:cNvPr id="12" name="Shape 9"/>
+          <p:cNvSpPr/>
+          <p:nvPr/>
+        </p:nvSpPr>
+        <p:spPr>
+          <a:xfrm>
+            <a:off x="7589520" y="4828032"/>
+            <a:ext cx="237744" cy="237744"/>
+          </a:xfrm>
+          <a:prstGeom prst="roundRect">
+            <a:avLst>
+              <a:gd name="adj" fmla="val 50000"/>
+            </a:avLst>
+          </a:prstGeom>
+          <a:solidFill>
+            <a:srgbClr val="C2410C"/>
+          </a:solidFill>
+          <a:ln w="12700">
+            <a:solidFill>
+              <a:srgbClr val="C2410C"/>
+            </a:solidFill>
+            <a:prstDash val="solid"/>
+          </a:ln>
+        </p:spPr>
+      </p:sp>
+      <p:sp>
+        <p:nvSpPr>
+          <p:cNvPr id="13" name="Text 10"/>
+          <p:cNvSpPr txBox="1"/>
+          <p:nvPr/>
+        </p:nvSpPr>
+        <p:spPr>
+          <a:xfrm>
+            <a:off x="7973568" y="4791456"/>
+            <a:ext cx="3657600" cy="310896"/>
+          </a:xfrm>
+          <a:prstGeom prst="rect">
+            <a:avLst/>
+          </a:prstGeom>
+          <a:noFill/>
+          <a:ln/>
+        </p:spPr>
+        <p:txBody>
+          <a:bodyPr wrap="square" lIns="0" tIns="0" rIns="0" bIns="0" rtlCol="0" anchor="ctr"/>
+          <a:lstStyle/>
+          <a:p>
+            <a:pPr indent="0" marL="0">
+              <a:buNone/>
+            </a:pPr>
+            <a:r>
+              <a:rPr lang="en-US" sz="1400" b="1" dirty="0">
+                <a:solidFill>
+                  <a:srgbClr val="18222B"/>
+                </a:solidFill>
+                <a:latin typeface="Cambria" pitchFamily="34" charset="0"/>
+                <a:ea typeface="Cambria" pitchFamily="34" charset="-122"/>
+                <a:cs typeface="Cambria" pitchFamily="34" charset="-120"/>
+              </a:rPr>
+              <a:t>Sized for gloved hands</a:t>
+            </a:r>
+            <a:endParaRPr lang="en-US" sz="1400" dirty="0"/>
+          </a:p>
+        </p:txBody>
+      </p:sp>
+      <p:sp>
+        <p:nvSpPr>
+          <p:cNvPr id="14" name="Text 11"/>
+          <p:cNvSpPr txBox="1"/>
+          <p:nvPr/>
+        </p:nvSpPr>
+        <p:spPr>
+          <a:xfrm>
+            <a:off x="7973568" y="5138928"/>
+            <a:ext cx="3657600" cy="1005840"/>
+          </a:xfrm>
+          <a:prstGeom prst="rect">
+            <a:avLst/>
+          </a:prstGeom>
+          <a:noFill/>
+          <a:ln/>
+        </p:spPr>
+        <p:txBody>
+          <a:bodyPr wrap="square" lIns="0" tIns="0" rIns="0" bIns="0" rtlCol="0" anchor="t"/>
+          <a:lstStyle/>
+          <a:p>
+            <a:pPr indent="0" marL="0">
+              <a:lnSpc>
+                <a:spcPts val="1500"/>
+              </a:lnSpc>
+              <a:buNone/>
+            </a:pPr>
+            <a:r>
+              <a:rPr lang="en-US" sz="1100" dirty="0">
+                <a:solidFill>
+                  <a:srgbClr val="5B6B78"/>
+                </a:solidFill>
+                <a:latin typeface="Calibri" pitchFamily="34" charset="0"/>
+                <a:ea typeface="Calibri" pitchFamily="34" charset="-122"/>
+                <a:cs typeface="Calibri" pitchFamily="34" charset="-120"/>
+              </a:rPr>
+              <a:t>60px touch targets, no text entry, high contrast. A tablet at the bench, not a dashboard at a desk.</a:t>
+            </a:r>
+            <a:endParaRPr lang="en-US" sz="1100" dirty="0"/>
+          </a:p>
+        </p:txBody>
+      </p:sp>
+      <p:sp>
+        <p:nvSpPr>
+          <p:cNvPr id="15" name="Text 12"/>
+          <p:cNvSpPr txBox="1"/>
+          <p:nvPr/>
+        </p:nvSpPr>
+        <p:spPr>
+          <a:xfrm>
+            <a:off x="7973568" y="5943600"/>
+            <a:ext cx="3657600" cy="914400"/>
+          </a:xfrm>
+          <a:prstGeom prst="rect">
+            <a:avLst/>
+          </a:prstGeom>
+          <a:noFill/>
+          <a:ln/>
+        </p:spPr>
+        <p:txBody>
+          <a:bodyPr wrap="square" lIns="0" tIns="0" rIns="0" bIns="0" rtlCol="0" anchor="t"/>
+          <a:lstStyle/>
+          <a:p>
+            <a:pPr algn="l" indent="0" marL="0">
+              <a:lnSpc>
+                <a:spcPts val="1400"/>
+              </a:lnSpc>
+              <a:buNone/>
+            </a:pPr>
+            <a:r>
+              <a:rPr lang="en-US" sz="1050" dirty="0">
+                <a:solidFill>
+                  <a:srgbClr val="5B6B78"/>
+                </a:solidFill>
+                <a:latin typeface="Calibri" pitchFamily="34" charset="0"/>
+                <a:ea typeface="Calibri" pitchFamily="34" charset="-122"/>
+                <a:cs typeface="Calibri" pitchFamily="34" charset="-120"/>
+              </a:rPr>
+              <a:t>A high-fidelity prototype is a product manager's deliverable. Building it in React would have demonstrated wanting to be a front-end engineer instead.</a:t>
+            </a:r>
+            <a:endParaRPr lang="en-US" sz="1050" dirty="0"/>
+          </a:p>
+        </p:txBody>
+      </p:sp>
+    </p:spTree>
+  </p:cSld>
+  <p:clrMapOvr>
+    <a:masterClrMapping/>
+  </p:clrMapOvr>
+</p:sld>
+</file>
+
+<file path=ppt/slides/slide14.xml><?xml version="1.0" encoding="utf-8"?>
+<p:sld xmlns:a="http://schemas.openxmlformats.org/drawingml/2006/main" xmlns:r="http://schemas.openxmlformats.org/officeDocument/2006/relationships" xmlns:p="http://schemas.openxmlformats.org/presentationml/2006/main">
+  <p:cSld name="Slide 14">
     <p:bg>
       <p:bgPr>
         <a:solidFill>
@@ -6509,7 +8319,7 @@
                 <a:ea typeface="Calibri" pitchFamily="34" charset="-122"/>
                 <a:cs typeface="Calibri" pitchFamily="34" charset="-120"/>
               </a:rPr>
-              <a:t>12  ·  WHAT WENT WRONG</a:t>
+              <a:t>13  ·  WHAT WENT WRONG</a:t>
             </a:r>
             <a:endParaRPr lang="en-US" sz="1050" dirty="0"/>
           </a:p>
@@ -7414,9 +9224,9 @@
 </p:sld>
 </file>
 
-<file path=ppt/slides/slide14.xml><?xml version="1.0" encoding="utf-8"?>
+<file path=ppt/slides/slide15.xml><?xml version="1.0" encoding="utf-8"?>
 <p:sld xmlns:a="http://schemas.openxmlformats.org/drawingml/2006/main" xmlns:r="http://schemas.openxmlformats.org/officeDocument/2006/relationships" xmlns:p="http://schemas.openxmlformats.org/presentationml/2006/main">
-  <p:cSld name="Slide 14">
+  <p:cSld name="Slide 15">
     <p:bg>
       <p:bgPr>
         <a:solidFill>
@@ -7498,7 +9308,7 @@
                 <a:ea typeface="Calibri" pitchFamily="34" charset="-122"/>
                 <a:cs typeface="Calibri" pitchFamily="34" charset="-120"/>
               </a:rPr>
-              <a:t>13  ·  SCOPE DISCIPLINE</a:t>
+              <a:t>14  ·  SCOPE DISCIPLINE</a:t>
             </a:r>
             <a:endParaRPr lang="en-US" sz="1050" dirty="0"/>
           </a:p>
@@ -8457,9 +10267,9 @@
 </p:sld>
 </file>
 
-<file path=ppt/slides/slide15.xml><?xml version="1.0" encoding="utf-8"?>
+<file path=ppt/slides/slide16.xml><?xml version="1.0" encoding="utf-8"?>
 <p:sld xmlns:a="http://schemas.openxmlformats.org/drawingml/2006/main" xmlns:r="http://schemas.openxmlformats.org/officeDocument/2006/relationships" xmlns:p="http://schemas.openxmlformats.org/presentationml/2006/main">
-  <p:cSld name="Slide 15">
+  <p:cSld name="Slide 16">
     <p:bg>
       <p:bgPr>
         <a:solidFill>
@@ -8541,7 +10351,7 @@
                 <a:ea typeface="Calibri" pitchFamily="34" charset="-122"/>
                 <a:cs typeface="Calibri" pitchFamily="34" charset="-120"/>
               </a:rPr>
-              <a:t>14  ·  WHY THIS, WHY ME</a:t>
+              <a:t>15  ·  WHY THIS, WHY ME</a:t>
             </a:r>
             <a:endParaRPr lang="en-US" sz="1050" dirty="0"/>
           </a:p>
@@ -9008,7 +10818,7 @@
                 <a:ea typeface="Courier New" pitchFamily="34" charset="-122"/>
                 <a:cs typeface="Courier New" pitchFamily="34" charset="-120"/>
               </a:rPr>
-              <a:t>github.com/…/ai-to-lab-orchestrator   ·   47 tests   ·   docs/architecture.md</a:t>
+              <a:t>github.com/…/ai-to-lab-orchestrator   ·   65 tests   ·   docs/architecture.md</a:t>
             </a:r>
             <a:endParaRPr lang="en-US" sz="1100" dirty="0"/>
           </a:p>

--- a/docs/deck/ai_to_lab_orchestrator.pptx
+++ b/docs/deck/ai_to_lab_orchestrator.pptx
@@ -10818,7 +10818,7 @@
                 <a:ea typeface="Courier New" pitchFamily="34" charset="-122"/>
                 <a:cs typeface="Courier New" pitchFamily="34" charset="-120"/>
               </a:rPr>
-              <a:t>github.com/…/ai-to-lab-orchestrator   ·   65 tests   ·   docs/architecture.md</a:t>
+              <a:t>github.com/dekunsun/ai-to-lab-orchestrator   ·   65 tests   ·   docs/architecture.md</a:t>
             </a:r>
             <a:endParaRPr lang="en-US" sz="1100" dirty="0"/>
           </a:p>

--- a/docs/deck/ai_to_lab_orchestrator.pptx
+++ b/docs/deck/ai_to_lab_orchestrator.pptx
@@ -1999,7 +1999,7 @@
           <a:p>
             <a:r>
               <a:rPr lang="en-US" dirty="0"/>
-              <a:t>This is the slide that separates me from a candidate who only shows what worked. The pattern across all five is the same: the failure mode that matters is the silent one, where the system looks right and is not.</a:t>
+              <a:t>This is the slide that separates me from a candidate who only shows what worked. The pattern across all six is the same: the failure mode that matters is the silent one, where the system looks right and is not. If time is short, tell 01 and 06 and let the slide carry the rest — 06 is the one that connects back to the honesty principle the whole project rests on.</a:t>
             </a:r>
             <a:endParaRPr lang="en-US" dirty="0"/>
           </a:p>
@@ -8358,7 +8358,7 @@
                 <a:ea typeface="Cambria" pitchFamily="34" charset="-122"/>
                 <a:cs typeface="Cambria" pitchFamily="34" charset="-120"/>
               </a:rPr>
-              <a:t>Five defects I found in my own build</a:t>
+              <a:t>Six defects I found in my own build</a:t>
             </a:r>
             <a:endParaRPr lang="en-US" sz="3400" dirty="0"/>
           </a:p>
@@ -8400,7 +8400,7 @@
                 <a:ea typeface="Calibri" pitchFamily="34" charset="-122"/>
                 <a:cs typeface="Calibri" pitchFamily="34" charset="-120"/>
               </a:rPr>
-              <a:t>These are real, not hypotheticals, and they are documented in the repository. Four of the five were silent — the system looked correct while being wrong.</a:t>
+              <a:t>These are real, not hypotheticals, and they are documented in the repository. Five of the six were silent — the system looked correct while being wrong.</a:t>
             </a:r>
             <a:endParaRPr lang="en-US" sz="1450" dirty="0"/>
           </a:p>
@@ -8414,7 +8414,7 @@
         </p:nvSpPr>
         <p:spPr>
           <a:xfrm>
-            <a:off x="566928" y="2212848"/>
+            <a:off x="566928" y="2157984"/>
             <a:ext cx="457200" cy="274320"/>
           </a:xfrm>
           <a:prstGeom prst="rect">
@@ -8431,7 +8431,7 @@
               <a:buNone/>
             </a:pPr>
             <a:r>
-              <a:rPr lang="en-US" sz="1200" b="1" dirty="0">
+              <a:rPr lang="en-US" sz="1150" b="1" dirty="0">
                 <a:solidFill>
                   <a:srgbClr val="C2410C"/>
                 </a:solidFill>
@@ -8441,7 +8441,7 @@
               </a:rPr>
               <a:t>01</a:t>
             </a:r>
-            <a:endParaRPr lang="en-US" sz="1200" dirty="0"/>
+            <a:endParaRPr lang="en-US" sz="1150" dirty="0"/>
           </a:p>
         </p:txBody>
       </p:sp>
@@ -8453,7 +8453,7 @@
         </p:nvSpPr>
         <p:spPr>
           <a:xfrm>
-            <a:off x="1069848" y="2212848"/>
+            <a:off x="1069848" y="2157984"/>
             <a:ext cx="3200400" cy="274320"/>
           </a:xfrm>
           <a:prstGeom prst="rect">
@@ -8470,7 +8470,7 @@
               <a:buNone/>
             </a:pPr>
             <a:r>
-              <a:rPr lang="en-US" sz="1350" b="1" dirty="0">
+              <a:rPr lang="en-US" sz="1250" b="1" dirty="0">
                 <a:solidFill>
                   <a:srgbClr val="FFFFFF"/>
                 </a:solidFill>
@@ -8480,7 +8480,7 @@
               </a:rPr>
               <a:t>The safety gate protected nothing</a:t>
             </a:r>
-            <a:endParaRPr lang="en-US" sz="1350" dirty="0"/>
+            <a:endParaRPr lang="en-US" sz="1250" dirty="0"/>
           </a:p>
         </p:txBody>
       </p:sp>
@@ -8492,8 +8492,8 @@
         </p:nvSpPr>
         <p:spPr>
           <a:xfrm>
-            <a:off x="4361688" y="2176272"/>
-            <a:ext cx="3474720" cy="822960"/>
+            <a:off x="4361688" y="2121408"/>
+            <a:ext cx="3474720" cy="713232"/>
           </a:xfrm>
           <a:prstGeom prst="rect">
             <a:avLst/>
@@ -8507,12 +8507,12 @@
           <a:p>
             <a:pPr indent="0" marL="0">
               <a:lnSpc>
-                <a:spcPts val="1250"/>
+                <a:spcPts val="1200"/>
               </a:lnSpc>
               <a:buNone/>
             </a:pPr>
             <a:r>
-              <a:rPr lang="en-US" sz="950" dirty="0">
+              <a:rPr lang="en-US" sz="900" dirty="0">
                 <a:solidFill>
                   <a:srgbClr val="9CACBA"/>
                 </a:solidFill>
@@ -8522,7 +8522,7 @@
               </a:rPr>
               <a:t>Its hazard region was a strict subset of the true failure region, so every experiment it flagged was already doomed. It prevented zero damage while appearing to work in every demo.</a:t>
             </a:r>
-            <a:endParaRPr lang="en-US" sz="950" dirty="0"/>
+            <a:endParaRPr lang="en-US" sz="900" dirty="0"/>
           </a:p>
         </p:txBody>
       </p:sp>
@@ -8534,8 +8534,8 @@
         </p:nvSpPr>
         <p:spPr>
           <a:xfrm>
-            <a:off x="8138160" y="2176272"/>
-            <a:ext cx="3474720" cy="822960"/>
+            <a:off x="8138160" y="2121408"/>
+            <a:ext cx="3474720" cy="713232"/>
           </a:xfrm>
           <a:prstGeom prst="rect">
             <a:avLst/>
@@ -8549,12 +8549,12 @@
           <a:p>
             <a:pPr indent="0" marL="0">
               <a:lnSpc>
-                <a:spcPts val="1250"/>
+                <a:spcPts val="1200"/>
               </a:lnSpc>
               <a:buNone/>
             </a:pPr>
             <a:r>
-              <a:rPr lang="en-US" sz="950" i="1" dirty="0">
+              <a:rPr lang="en-US" sz="900" i="1" dirty="0">
                 <a:solidFill>
                   <a:srgbClr val="6FA8CE"/>
                 </a:solidFill>
@@ -8564,7 +8564,7 @@
               </a:rPr>
               <a:t>Governance fails identically to how it succeeds. It needs a test, not a demo.</a:t>
             </a:r>
-            <a:endParaRPr lang="en-US" sz="950" dirty="0"/>
+            <a:endParaRPr lang="en-US" sz="900" dirty="0"/>
           </a:p>
         </p:txBody>
       </p:sp>
@@ -8576,7 +8576,7 @@
         </p:nvSpPr>
         <p:spPr>
           <a:xfrm>
-            <a:off x="566928" y="3081528"/>
+            <a:off x="566928" y="2898648"/>
             <a:ext cx="457200" cy="274320"/>
           </a:xfrm>
           <a:prstGeom prst="rect">
@@ -8593,7 +8593,7 @@
               <a:buNone/>
             </a:pPr>
             <a:r>
-              <a:rPr lang="en-US" sz="1200" b="1" dirty="0">
+              <a:rPr lang="en-US" sz="1150" b="1" dirty="0">
                 <a:solidFill>
                   <a:srgbClr val="C2410C"/>
                 </a:solidFill>
@@ -8603,7 +8603,7 @@
               </a:rPr>
               <a:t>02</a:t>
             </a:r>
-            <a:endParaRPr lang="en-US" sz="1200" dirty="0"/>
+            <a:endParaRPr lang="en-US" sz="1150" dirty="0"/>
           </a:p>
         </p:txBody>
       </p:sp>
@@ -8615,7 +8615,7 @@
         </p:nvSpPr>
         <p:spPr>
           <a:xfrm>
-            <a:off x="1069848" y="3081528"/>
+            <a:off x="1069848" y="2898648"/>
             <a:ext cx="3200400" cy="274320"/>
           </a:xfrm>
           <a:prstGeom prst="rect">
@@ -8632,7 +8632,7 @@
               <a:buNone/>
             </a:pPr>
             <a:r>
-              <a:rPr lang="en-US" sz="1350" b="1" dirty="0">
+              <a:rPr lang="en-US" sz="1250" b="1" dirty="0">
                 <a:solidFill>
                   <a:srgbClr val="FFFFFF"/>
                 </a:solidFill>
@@ -8642,7 +8642,7 @@
               </a:rPr>
               <a:t>The benchmark numbers were wrong</a:t>
             </a:r>
-            <a:endParaRPr lang="en-US" sz="1350" dirty="0"/>
+            <a:endParaRPr lang="en-US" sz="1250" dirty="0"/>
           </a:p>
         </p:txBody>
       </p:sp>
@@ -8654,8 +8654,8 @@
         </p:nvSpPr>
         <p:spPr>
           <a:xfrm>
-            <a:off x="4361688" y="3044952"/>
-            <a:ext cx="3474720" cy="822960"/>
+            <a:off x="4361688" y="2862072"/>
+            <a:ext cx="3474720" cy="713232"/>
           </a:xfrm>
           <a:prstGeom prst="rect">
             <a:avLst/>
@@ -8669,12 +8669,12 @@
           <a:p>
             <a:pPr indent="0" marL="0">
               <a:lnSpc>
-                <a:spcPts val="1250"/>
+                <a:spcPts val="1200"/>
               </a:lnSpc>
               <a:buNone/>
             </a:pPr>
             <a:r>
-              <a:rPr lang="en-US" sz="950" dirty="0">
+              <a:rPr lang="en-US" sz="900" dirty="0">
                 <a:solidFill>
                   <a:srgbClr val="9CACBA"/>
                 </a:solidFill>
@@ -8684,7 +8684,7 @@
               </a:rPr>
               <a:t>The README claimed a BO median of 0.84. The measured value was 0.806, and no script in the repository produced either number.</a:t>
             </a:r>
-            <a:endParaRPr lang="en-US" sz="950" dirty="0"/>
+            <a:endParaRPr lang="en-US" sz="900" dirty="0"/>
           </a:p>
         </p:txBody>
       </p:sp>
@@ -8696,8 +8696,8 @@
         </p:nvSpPr>
         <p:spPr>
           <a:xfrm>
-            <a:off x="8138160" y="3044952"/>
-            <a:ext cx="3474720" cy="822960"/>
+            <a:off x="8138160" y="2862072"/>
+            <a:ext cx="3474720" cy="713232"/>
           </a:xfrm>
           <a:prstGeom prst="rect">
             <a:avLst/>
@@ -8711,12 +8711,12 @@
           <a:p>
             <a:pPr indent="0" marL="0">
               <a:lnSpc>
-                <a:spcPts val="1250"/>
+                <a:spcPts val="1200"/>
               </a:lnSpc>
               <a:buNone/>
             </a:pPr>
             <a:r>
-              <a:rPr lang="en-US" sz="950" i="1" dirty="0">
+              <a:rPr lang="en-US" sz="900" i="1" dirty="0">
                 <a:solidFill>
                   <a:srgbClr val="6FA8CE"/>
                 </a:solidFill>
@@ -8726,7 +8726,7 @@
               </a:rPr>
               <a:t>One script is now the sole source of every published figure.</a:t>
             </a:r>
-            <a:endParaRPr lang="en-US" sz="950" dirty="0"/>
+            <a:endParaRPr lang="en-US" sz="900" dirty="0"/>
           </a:p>
         </p:txBody>
       </p:sp>
@@ -8738,7 +8738,7 @@
         </p:nvSpPr>
         <p:spPr>
           <a:xfrm>
-            <a:off x="566928" y="3950208"/>
+            <a:off x="566928" y="3639312"/>
             <a:ext cx="457200" cy="274320"/>
           </a:xfrm>
           <a:prstGeom prst="rect">
@@ -8755,7 +8755,7 @@
               <a:buNone/>
             </a:pPr>
             <a:r>
-              <a:rPr lang="en-US" sz="1200" b="1" dirty="0">
+              <a:rPr lang="en-US" sz="1150" b="1" dirty="0">
                 <a:solidFill>
                   <a:srgbClr val="C2410C"/>
                 </a:solidFill>
@@ -8765,7 +8765,7 @@
               </a:rPr>
               <a:t>03</a:t>
             </a:r>
-            <a:endParaRPr lang="en-US" sz="1200" dirty="0"/>
+            <a:endParaRPr lang="en-US" sz="1150" dirty="0"/>
           </a:p>
         </p:txBody>
       </p:sp>
@@ -8777,7 +8777,7 @@
         </p:nvSpPr>
         <p:spPr>
           <a:xfrm>
-            <a:off x="1069848" y="3950208"/>
+            <a:off x="1069848" y="3639312"/>
             <a:ext cx="3200400" cy="274320"/>
           </a:xfrm>
           <a:prstGeom prst="rect">
@@ -8794,7 +8794,7 @@
               <a:buNone/>
             </a:pPr>
             <a:r>
-              <a:rPr lang="en-US" sz="1350" b="1" dirty="0">
+              <a:rPr lang="en-US" sz="1250" b="1" dirty="0">
                 <a:solidFill>
                   <a:srgbClr val="FFFFFF"/>
                 </a:solidFill>
@@ -8804,7 +8804,7 @@
               </a:rPr>
               <a:t>One RNG served lab and optimizer</a:t>
             </a:r>
-            <a:endParaRPr lang="en-US" sz="1350" dirty="0"/>
+            <a:endParaRPr lang="en-US" sz="1250" dirty="0"/>
           </a:p>
         </p:txBody>
       </p:sp>
@@ -8816,8 +8816,8 @@
         </p:nvSpPr>
         <p:spPr>
           <a:xfrm>
-            <a:off x="4361688" y="3913632"/>
-            <a:ext cx="3474720" cy="822960"/>
+            <a:off x="4361688" y="3602736"/>
+            <a:ext cx="3474720" cy="713232"/>
           </a:xfrm>
           <a:prstGeom prst="rect">
             <a:avLst/>
@@ -8831,12 +8831,12 @@
           <a:p>
             <a:pPr indent="0" marL="0">
               <a:lnSpc>
-                <a:spcPts val="1250"/>
+                <a:spcPts val="1200"/>
               </a:lnSpc>
               <a:buNone/>
             </a:pPr>
             <a:r>
-              <a:rPr lang="en-US" sz="950" dirty="0">
+              <a:rPr lang="en-US" sz="900" dirty="0">
                 <a:solidFill>
                   <a:srgbClr val="9CACBA"/>
                 </a:solidFill>
@@ -8846,7 +8846,7 @@
               </a:rPr>
               <a:t>BO draws ~512 candidates per iteration, random search draws 5 — so the two methods faced different measurement noise. The per-seed comparison was meaningless.</a:t>
             </a:r>
-            <a:endParaRPr lang="en-US" sz="950" dirty="0"/>
+            <a:endParaRPr lang="en-US" sz="900" dirty="0"/>
           </a:p>
         </p:txBody>
       </p:sp>
@@ -8858,8 +8858,8 @@
         </p:nvSpPr>
         <p:spPr>
           <a:xfrm>
-            <a:off x="8138160" y="3913632"/>
-            <a:ext cx="3474720" cy="822960"/>
+            <a:off x="8138160" y="3602736"/>
+            <a:ext cx="3474720" cy="713232"/>
           </a:xfrm>
           <a:prstGeom prst="rect">
             <a:avLst/>
@@ -8873,12 +8873,12 @@
           <a:p>
             <a:pPr indent="0" marL="0">
               <a:lnSpc>
-                <a:spcPts val="1250"/>
+                <a:spcPts val="1200"/>
               </a:lnSpc>
               <a:buNone/>
             </a:pPr>
             <a:r>
-              <a:rPr lang="en-US" sz="950" i="1" dirty="0">
+              <a:rPr lang="en-US" sz="900" i="1" dirty="0">
                 <a:solidFill>
                   <a:srgbClr val="6FA8CE"/>
                 </a:solidFill>
@@ -8888,7 +8888,7 @@
               </a:rPr>
               <a:t>Separate streams, and common random numbers across methods.</a:t>
             </a:r>
-            <a:endParaRPr lang="en-US" sz="950" dirty="0"/>
+            <a:endParaRPr lang="en-US" sz="900" dirty="0"/>
           </a:p>
         </p:txBody>
       </p:sp>
@@ -8900,7 +8900,7 @@
         </p:nvSpPr>
         <p:spPr>
           <a:xfrm>
-            <a:off x="566928" y="4818888"/>
+            <a:off x="566928" y="4379976"/>
             <a:ext cx="457200" cy="274320"/>
           </a:xfrm>
           <a:prstGeom prst="rect">
@@ -8917,7 +8917,7 @@
               <a:buNone/>
             </a:pPr>
             <a:r>
-              <a:rPr lang="en-US" sz="1200" b="1" dirty="0">
+              <a:rPr lang="en-US" sz="1150" b="1" dirty="0">
                 <a:solidFill>
                   <a:srgbClr val="C2410C"/>
                 </a:solidFill>
@@ -8927,7 +8927,7 @@
               </a:rPr>
               <a:t>04</a:t>
             </a:r>
-            <a:endParaRPr lang="en-US" sz="1200" dirty="0"/>
+            <a:endParaRPr lang="en-US" sz="1150" dirty="0"/>
           </a:p>
         </p:txBody>
       </p:sp>
@@ -8939,7 +8939,7 @@
         </p:nvSpPr>
         <p:spPr>
           <a:xfrm>
-            <a:off x="1069848" y="4818888"/>
+            <a:off x="1069848" y="4379976"/>
             <a:ext cx="3200400" cy="274320"/>
           </a:xfrm>
           <a:prstGeom prst="rect">
@@ -8956,7 +8956,7 @@
               <a:buNone/>
             </a:pPr>
             <a:r>
-              <a:rPr lang="en-US" sz="1350" b="1" dirty="0">
+              <a:rPr lang="en-US" sz="1250" b="1" dirty="0">
                 <a:solidFill>
                   <a:srgbClr val="FFFFFF"/>
                 </a:solidFill>
@@ -8966,7 +8966,7 @@
               </a:rPr>
               <a:t>BO got trapped in failure regions</a:t>
             </a:r>
-            <a:endParaRPr lang="en-US" sz="1350" dirty="0"/>
+            <a:endParaRPr lang="en-US" sz="1250" dirty="0"/>
           </a:p>
         </p:txBody>
       </p:sp>
@@ -8978,8 +8978,8 @@
         </p:nvSpPr>
         <p:spPr>
           <a:xfrm>
-            <a:off x="4361688" y="4782312"/>
-            <a:ext cx="3474720" cy="822960"/>
+            <a:off x="4361688" y="4343400"/>
+            <a:ext cx="3474720" cy="713232"/>
           </a:xfrm>
           <a:prstGeom prst="rect">
             <a:avLst/>
@@ -8993,12 +8993,12 @@
           <a:p>
             <a:pPr indent="0" marL="0">
               <a:lnSpc>
-                <a:spcPts val="1250"/>
+                <a:spcPts val="1200"/>
               </a:lnSpc>
               <a:buNone/>
             </a:pPr>
             <a:r>
-              <a:rPr lang="en-US" sz="950" dirty="0">
+              <a:rPr lang="en-US" sz="900" dirty="0">
                 <a:solidFill>
                   <a:srgbClr val="9CACBA"/>
                 </a:solidFill>
@@ -9008,7 +9008,7 @@
               </a:rPr>
               <a:t>Failed experiments yield no objective, so a naive surrogate never learns to avoid them and keeps re-proposing into the dead zone, burning budget.</a:t>
             </a:r>
-            <a:endParaRPr lang="en-US" sz="950" dirty="0"/>
+            <a:endParaRPr lang="en-US" sz="900" dirty="0"/>
           </a:p>
         </p:txBody>
       </p:sp>
@@ -9020,8 +9020,8 @@
         </p:nvSpPr>
         <p:spPr>
           <a:xfrm>
-            <a:off x="8138160" y="4782312"/>
-            <a:ext cx="3474720" cy="822960"/>
+            <a:off x="8138160" y="4343400"/>
+            <a:ext cx="3474720" cy="713232"/>
           </a:xfrm>
           <a:prstGeom prst="rect">
             <a:avLst/>
@@ -9035,12 +9035,12 @@
           <a:p>
             <a:pPr indent="0" marL="0">
               <a:lnSpc>
-                <a:spcPts val="1250"/>
+                <a:spcPts val="1200"/>
               </a:lnSpc>
               <a:buNone/>
             </a:pPr>
             <a:r>
-              <a:rPr lang="en-US" sz="950" i="1" dirty="0">
+              <a:rPr lang="en-US" sz="900" i="1" dirty="0">
                 <a:solidFill>
                   <a:srgbClr val="6FA8CE"/>
                 </a:solidFill>
@@ -9050,7 +9050,7 @@
               </a:rPr>
               <a:t>A feasibility penalty and an escape hatch — a real constrained-BO problem.</a:t>
             </a:r>
-            <a:endParaRPr lang="en-US" sz="950" dirty="0"/>
+            <a:endParaRPr lang="en-US" sz="900" dirty="0"/>
           </a:p>
         </p:txBody>
       </p:sp>
@@ -9062,7 +9062,7 @@
         </p:nvSpPr>
         <p:spPr>
           <a:xfrm>
-            <a:off x="566928" y="5687568"/>
+            <a:off x="566928" y="5120640"/>
             <a:ext cx="457200" cy="274320"/>
           </a:xfrm>
           <a:prstGeom prst="rect">
@@ -9079,7 +9079,7 @@
               <a:buNone/>
             </a:pPr>
             <a:r>
-              <a:rPr lang="en-US" sz="1200" b="1" dirty="0">
+              <a:rPr lang="en-US" sz="1150" b="1" dirty="0">
                 <a:solidFill>
                   <a:srgbClr val="C2410C"/>
                 </a:solidFill>
@@ -9089,7 +9089,7 @@
               </a:rPr>
               <a:t>05</a:t>
             </a:r>
-            <a:endParaRPr lang="en-US" sz="1200" dirty="0"/>
+            <a:endParaRPr lang="en-US" sz="1150" dirty="0"/>
           </a:p>
         </p:txBody>
       </p:sp>
@@ -9101,7 +9101,7 @@
         </p:nvSpPr>
         <p:spPr>
           <a:xfrm>
-            <a:off x="1069848" y="5687568"/>
+            <a:off x="1069848" y="5120640"/>
             <a:ext cx="3200400" cy="274320"/>
           </a:xfrm>
           <a:prstGeom prst="rect">
@@ -9118,7 +9118,7 @@
               <a:buNone/>
             </a:pPr>
             <a:r>
-              <a:rPr lang="en-US" sz="1350" b="1" dirty="0">
+              <a:rPr lang="en-US" sz="1250" b="1" dirty="0">
                 <a:solidFill>
                   <a:srgbClr val="FFFFFF"/>
                 </a:solidFill>
@@ -9128,7 +9128,7 @@
               </a:rPr>
               <a:t>Rounding moved the median by 0.006</a:t>
             </a:r>
-            <a:endParaRPr lang="en-US" sz="1350" dirty="0"/>
+            <a:endParaRPr lang="en-US" sz="1250" dirty="0"/>
           </a:p>
         </p:txBody>
       </p:sp>
@@ -9140,8 +9140,8 @@
         </p:nvSpPr>
         <p:spPr>
           <a:xfrm>
-            <a:off x="4361688" y="5650992"/>
-            <a:ext cx="3474720" cy="822960"/>
+            <a:off x="4361688" y="5084064"/>
+            <a:ext cx="3474720" cy="713232"/>
           </a:xfrm>
           <a:prstGeom prst="rect">
             <a:avLst/>
@@ -9155,12 +9155,12 @@
           <a:p>
             <a:pPr indent="0" marL="0">
               <a:lnSpc>
-                <a:spcPts val="1250"/>
+                <a:spcPts val="1200"/>
               </a:lnSpc>
               <a:buNone/>
             </a:pPr>
             <a:r>
-              <a:rPr lang="en-US" sz="950" dirty="0">
+              <a:rPr lang="en-US" sz="900" dirty="0">
                 <a:solidFill>
                   <a:srgbClr val="9CACBA"/>
                 </a:solidFill>
@@ -9170,7 +9170,7 @@
               </a:rPr>
               <a:t>Rounding each weighted term to six decimals — a 1e-4 perturbation — changed which point the GP held as incumbent, changed the argmax of Expected Improvement, and redirected the whole search.</a:t>
             </a:r>
-            <a:endParaRPr lang="en-US" sz="950" dirty="0"/>
+            <a:endParaRPr lang="en-US" sz="900" dirty="0"/>
           </a:p>
         </p:txBody>
       </p:sp>
@@ -9182,8 +9182,8 @@
         </p:nvSpPr>
         <p:spPr>
           <a:xfrm>
-            <a:off x="8138160" y="5650992"/>
-            <a:ext cx="3474720" cy="822960"/>
+            <a:off x="8138160" y="5084064"/>
+            <a:ext cx="3474720" cy="713232"/>
           </a:xfrm>
           <a:prstGeom prst="rect">
             <a:avLst/>
@@ -9197,12 +9197,12 @@
           <a:p>
             <a:pPr indent="0" marL="0">
               <a:lnSpc>
-                <a:spcPts val="1250"/>
+                <a:spcPts val="1200"/>
               </a:lnSpc>
               <a:buNone/>
             </a:pPr>
             <a:r>
-              <a:rPr lang="en-US" sz="950" i="1" dirty="0">
+              <a:rPr lang="en-US" sz="900" i="1" dirty="0">
                 <a:solidFill>
                   <a:srgbClr val="6FA8CE"/>
                 </a:solidFill>
@@ -9212,7 +9212,169 @@
               </a:rPr>
               <a:t>Closed loops are chaotically sensitive to their own numerics. Round for display, never before a decision.</a:t>
             </a:r>
-            <a:endParaRPr lang="en-US" sz="950" dirty="0"/>
+            <a:endParaRPr lang="en-US" sz="900" dirty="0"/>
+          </a:p>
+        </p:txBody>
+      </p:sp>
+      <p:sp>
+        <p:nvSpPr>
+          <p:cNvPr id="26" name="Text 24"/>
+          <p:cNvSpPr txBox="1"/>
+          <p:nvPr/>
+        </p:nvSpPr>
+        <p:spPr>
+          <a:xfrm>
+            <a:off x="566928" y="5861304"/>
+            <a:ext cx="457200" cy="274320"/>
+          </a:xfrm>
+          <a:prstGeom prst="rect">
+            <a:avLst/>
+          </a:prstGeom>
+          <a:noFill/>
+          <a:ln/>
+        </p:spPr>
+        <p:txBody>
+          <a:bodyPr wrap="square" lIns="0" tIns="0" rIns="0" bIns="0" rtlCol="0" anchor="ctr"/>
+          <a:lstStyle/>
+          <a:p>
+            <a:pPr indent="0" marL="0">
+              <a:buNone/>
+            </a:pPr>
+            <a:r>
+              <a:rPr lang="en-US" sz="1150" b="1" dirty="0">
+                <a:solidFill>
+                  <a:srgbClr val="C2410C"/>
+                </a:solidFill>
+                <a:latin typeface="Courier New" pitchFamily="34" charset="0"/>
+                <a:ea typeface="Courier New" pitchFamily="34" charset="-122"/>
+                <a:cs typeface="Courier New" pitchFamily="34" charset="-120"/>
+              </a:rPr>
+              <a:t>06</a:t>
+            </a:r>
+            <a:endParaRPr lang="en-US" sz="1150" dirty="0"/>
+          </a:p>
+        </p:txBody>
+      </p:sp>
+      <p:sp>
+        <p:nvSpPr>
+          <p:cNvPr id="27" name="Text 25"/>
+          <p:cNvSpPr txBox="1"/>
+          <p:nvPr/>
+        </p:nvSpPr>
+        <p:spPr>
+          <a:xfrm>
+            <a:off x="1069848" y="5861304"/>
+            <a:ext cx="3200400" cy="274320"/>
+          </a:xfrm>
+          <a:prstGeom prst="rect">
+            <a:avLst/>
+          </a:prstGeom>
+          <a:noFill/>
+          <a:ln/>
+        </p:spPr>
+        <p:txBody>
+          <a:bodyPr wrap="square" lIns="0" tIns="0" rIns="0" bIns="0" rtlCol="0" anchor="ctr"/>
+          <a:lstStyle/>
+          <a:p>
+            <a:pPr indent="0" marL="0">
+              <a:buNone/>
+            </a:pPr>
+            <a:r>
+              <a:rPr lang="en-US" sz="1250" b="1" dirty="0">
+                <a:solidFill>
+                  <a:srgbClr val="FFFFFF"/>
+                </a:solidFill>
+                <a:latin typeface="Cambria" pitchFamily="34" charset="0"/>
+                <a:ea typeface="Cambria" pitchFamily="34" charset="-122"/>
+                <a:cs typeface="Cambria" pitchFamily="34" charset="-120"/>
+              </a:rPr>
+              <a:t>Fabricated data labelled as published</a:t>
+            </a:r>
+            <a:endParaRPr lang="en-US" sz="1250" dirty="0"/>
+          </a:p>
+        </p:txBody>
+      </p:sp>
+      <p:sp>
+        <p:nvSpPr>
+          <p:cNvPr id="28" name="Text 26"/>
+          <p:cNvSpPr txBox="1"/>
+          <p:nvPr/>
+        </p:nvSpPr>
+        <p:spPr>
+          <a:xfrm>
+            <a:off x="4361688" y="5824728"/>
+            <a:ext cx="3474720" cy="713232"/>
+          </a:xfrm>
+          <a:prstGeom prst="rect">
+            <a:avLst/>
+          </a:prstGeom>
+          <a:noFill/>
+          <a:ln/>
+        </p:spPr>
+        <p:txBody>
+          <a:bodyPr wrap="square" lIns="0" tIns="0" rIns="0" bIns="0" rtlCol="0" anchor="t"/>
+          <a:lstStyle/>
+          <a:p>
+            <a:pPr indent="0" marL="0">
+              <a:lnSpc>
+                <a:spcPts val="1200"/>
+              </a:lnSpc>
+              <a:buNone/>
+            </a:pPr>
+            <a:r>
+              <a:rPr lang="en-US" sz="900" dirty="0">
+                <a:solidFill>
+                  <a:srgbClr val="9CACBA"/>
+                </a:solidFill>
+                <a:latin typeface="Calibri" pitchFamily="34" charset="0"/>
+                <a:ea typeface="Calibri" pitchFamily="34" charset="-122"/>
+                <a:cs typeface="Calibri" pitchFamily="34" charset="-120"/>
+              </a:rPr>
+              <a:t>An earlier version shipped a 25-row hydride dataset whose header said the values came straight from the paper. Three compounds in it appear nowhere in that paper. Invented numbers, presented as measurements.</a:t>
+            </a:r>
+            <a:endParaRPr lang="en-US" sz="900" dirty="0"/>
+          </a:p>
+        </p:txBody>
+      </p:sp>
+      <p:sp>
+        <p:nvSpPr>
+          <p:cNvPr id="29" name="Text 27"/>
+          <p:cNvSpPr txBox="1"/>
+          <p:nvPr/>
+        </p:nvSpPr>
+        <p:spPr>
+          <a:xfrm>
+            <a:off x="8138160" y="5824728"/>
+            <a:ext cx="3474720" cy="713232"/>
+          </a:xfrm>
+          <a:prstGeom prst="rect">
+            <a:avLst/>
+          </a:prstGeom>
+          <a:noFill/>
+          <a:ln/>
+        </p:spPr>
+        <p:txBody>
+          <a:bodyPr wrap="square" lIns="0" tIns="0" rIns="0" bIns="0" rtlCol="0" anchor="t"/>
+          <a:lstStyle/>
+          <a:p>
+            <a:pPr indent="0" marL="0">
+              <a:lnSpc>
+                <a:spcPts val="1200"/>
+              </a:lnSpc>
+              <a:buNone/>
+            </a:pPr>
+            <a:r>
+              <a:rPr lang="en-US" sz="900" i="1" dirty="0">
+                <a:solidFill>
+                  <a:srgbClr val="6FA8CE"/>
+                </a:solidFill>
+                <a:latin typeface="Calibri" pitchFamily="34" charset="0"/>
+                <a:ea typeface="Calibri" pitchFamily="34" charset="-122"/>
+                <a:cs typeface="Calibri" pitchFamily="34" charset="-120"/>
+              </a:rPr>
+              <a:t>A fabricated row is indistinguishable from a transcribed one once they share a file. Provenance has to be a boundary, not a comment.</a:t>
+            </a:r>
+            <a:endParaRPr lang="en-US" sz="900" dirty="0"/>
           </a:p>
         </p:txBody>
       </p:sp>
